--- a/第3章-空间数据读写及可视化/第1节-矢量数据读写及可视化-4课时.pptx
+++ b/第3章-空间数据读写及可视化/第1节-矢量数据读写及可视化-4课时.pptx
@@ -27,7 +27,7 @@
     <p:sldId id="2771" r:id="rId15"/>
     <p:sldId id="2760" r:id="rId16"/>
   </p:sldIdLst>
-  <p:sldSz cx="9144000" cy="6858000" type="screen4x3"/>
+  <p:sldSz cx="12192000" cy="6858000"/>
   <p:notesSz cx="7099300" cy="10234613"/>
   <p:custDataLst>
     <p:tags r:id="rId19"/>
@@ -160,257 +160,257 @@
   <p:extLst>
     <p:ext uri="{EFAFB233-063F-42B5-8137-9DF3F51BA10A}">
       <p15:sldGuideLst xmlns:p15="http://schemas.microsoft.com/office/powerpoint/2012/main">
-        <p15:guide id="1" orient="horz" pos="663">
+        <p15:guide id="1" orient="horz" pos="663" userDrawn="1">
           <p15:clr>
             <a:srgbClr val="A4A3A4"/>
           </p15:clr>
         </p15:guide>
-        <p15:guide id="2" orient="horz" pos="1412">
+        <p15:guide id="2" orient="horz" pos="1412" userDrawn="1">
           <p15:clr>
             <a:srgbClr val="A4A3A4"/>
           </p15:clr>
         </p15:guide>
-        <p15:guide id="3" pos="181">
+        <p15:guide id="3" pos="241" userDrawn="1">
           <p15:clr>
             <a:srgbClr val="A4A3A4"/>
           </p15:clr>
         </p15:guide>
-        <p15:guide id="4" pos="5556">
+        <p15:guide id="4" pos="7408" userDrawn="1">
           <p15:clr>
             <a:srgbClr val="A4A3A4"/>
           </p15:clr>
         </p15:guide>
-        <p15:guide id="5" pos="2903">
+        <p15:guide id="5" pos="3871" userDrawn="1">
           <p15:clr>
             <a:srgbClr val="A4A3A4"/>
           </p15:clr>
         </p15:guide>
-        <p15:guide id="6" orient="horz" pos="700">
+        <p15:guide id="6" orient="horz" pos="700" userDrawn="1">
           <p15:clr>
             <a:srgbClr val="A4A3A4"/>
           </p15:clr>
         </p15:guide>
-        <p15:guide id="7" orient="horz" pos="4119">
+        <p15:guide id="7" orient="horz" pos="4119" userDrawn="1">
           <p15:clr>
             <a:srgbClr val="A4A3A4"/>
           </p15:clr>
         </p15:guide>
-        <p15:guide id="8" pos="311">
+        <p15:guide id="8" pos="415" userDrawn="1">
           <p15:clr>
             <a:srgbClr val="A4A3A4"/>
           </p15:clr>
         </p15:guide>
-        <p15:guide id="9" pos="5501">
+        <p15:guide id="9" pos="7335" userDrawn="1">
           <p15:clr>
             <a:srgbClr val="A4A3A4"/>
           </p15:clr>
         </p15:guide>
-        <p15:guide id="10" orient="horz" pos="462">
+        <p15:guide id="10" orient="horz" pos="462" userDrawn="1">
           <p15:clr>
             <a:srgbClr val="A4A3A4"/>
           </p15:clr>
         </p15:guide>
-        <p15:guide id="11" pos="77">
+        <p15:guide id="11" pos="103" userDrawn="1">
           <p15:clr>
             <a:srgbClr val="A4A3A4"/>
           </p15:clr>
         </p15:guide>
-        <p15:guide id="12" pos="72">
+        <p15:guide id="12" pos="96" userDrawn="1">
           <p15:clr>
             <a:srgbClr val="A4A3A4"/>
           </p15:clr>
         </p15:guide>
-        <p15:guide id="13" orient="horz" pos="2">
+        <p15:guide id="13" orient="horz" pos="2" userDrawn="1">
           <p15:clr>
             <a:srgbClr val="A4A3A4"/>
           </p15:clr>
         </p15:guide>
-        <p15:guide id="14" pos="807">
+        <p15:guide id="14" pos="1076" userDrawn="1">
           <p15:clr>
             <a:srgbClr val="A4A3A4"/>
           </p15:clr>
         </p15:guide>
-        <p15:guide id="15" pos="1463">
+        <p15:guide id="15" pos="1951" userDrawn="1">
           <p15:clr>
             <a:srgbClr val="A4A3A4"/>
           </p15:clr>
         </p15:guide>
-        <p15:guide id="16" pos="2079">
+        <p15:guide id="16" pos="2772" userDrawn="1">
           <p15:clr>
             <a:srgbClr val="A4A3A4"/>
           </p15:clr>
         </p15:guide>
-        <p15:guide id="17" pos="2714">
+        <p15:guide id="17" pos="3619" userDrawn="1">
           <p15:clr>
             <a:srgbClr val="A4A3A4"/>
           </p15:clr>
         </p15:guide>
-        <p15:guide id="18" pos="3370">
+        <p15:guide id="18" pos="4493" userDrawn="1">
           <p15:clr>
             <a:srgbClr val="A4A3A4"/>
           </p15:clr>
         </p15:guide>
-        <p15:guide id="19" pos="3985">
+        <p15:guide id="19" pos="5313" userDrawn="1">
           <p15:clr>
             <a:srgbClr val="A4A3A4"/>
           </p15:clr>
         </p15:guide>
-        <p15:guide id="20" pos="4631">
+        <p15:guide id="20" pos="6175" userDrawn="1">
           <p15:clr>
             <a:srgbClr val="A4A3A4"/>
           </p15:clr>
         </p15:guide>
-        <p15:guide id="21" orient="horz" pos="581">
+        <p15:guide id="21" orient="horz" pos="581" userDrawn="1">
           <p15:clr>
             <a:srgbClr val="A4A3A4"/>
           </p15:clr>
         </p15:guide>
-        <p15:guide id="22" orient="horz" pos="3230">
+        <p15:guide id="22" orient="horz" pos="3230" userDrawn="1">
           <p15:clr>
             <a:srgbClr val="A4A3A4"/>
           </p15:clr>
         </p15:guide>
-        <p15:guide id="23" orient="horz" pos="1230">
+        <p15:guide id="23" orient="horz" pos="1230" userDrawn="1">
           <p15:clr>
             <a:srgbClr val="A4A3A4"/>
           </p15:clr>
         </p15:guide>
-        <p15:guide id="24" orient="horz">
+        <p15:guide id="24" orient="horz" userDrawn="1">
           <p15:clr>
             <a:srgbClr val="A4A3A4"/>
           </p15:clr>
         </p15:guide>
-        <p15:guide id="25" orient="horz" pos="1450">
+        <p15:guide id="25" orient="horz" pos="1450" userDrawn="1">
           <p15:clr>
             <a:srgbClr val="A4A3A4"/>
           </p15:clr>
         </p15:guide>
-        <p15:guide id="26" pos="281">
+        <p15:guide id="26" pos="375" userDrawn="1">
           <p15:clr>
             <a:srgbClr val="A4A3A4"/>
           </p15:clr>
         </p15:guide>
-        <p15:guide id="27" orient="horz" pos="3095">
+        <p15:guide id="27" orient="horz" pos="3095" userDrawn="1">
           <p15:clr>
             <a:srgbClr val="A4A3A4"/>
           </p15:clr>
         </p15:guide>
-        <p15:guide id="28" orient="horz" pos="2372">
+        <p15:guide id="28" orient="horz" pos="2372" userDrawn="1">
           <p15:clr>
             <a:srgbClr val="A4A3A4"/>
           </p15:clr>
         </p15:guide>
-        <p15:guide id="29" orient="horz" pos="4159">
+        <p15:guide id="29" orient="horz" pos="4159" userDrawn="1">
           <p15:clr>
             <a:srgbClr val="A4A3A4"/>
           </p15:clr>
         </p15:guide>
-        <p15:guide id="30" pos="313">
+        <p15:guide id="30" pos="417" userDrawn="1">
           <p15:clr>
             <a:srgbClr val="A4A3A4"/>
           </p15:clr>
         </p15:guide>
-        <p15:guide id="31" pos="1655">
+        <p15:guide id="31" pos="2207" userDrawn="1">
           <p15:clr>
             <a:srgbClr val="A4A3A4"/>
           </p15:clr>
         </p15:guide>
-        <p15:guide id="32" pos="5727">
+        <p15:guide id="32" pos="7636" userDrawn="1">
           <p15:clr>
             <a:srgbClr val="A4A3A4"/>
           </p15:clr>
         </p15:guide>
-        <p15:guide id="33" orient="horz" pos="632">
+        <p15:guide id="33" orient="horz" pos="632" userDrawn="1">
           <p15:clr>
             <a:srgbClr val="A4A3A4"/>
           </p15:clr>
         </p15:guide>
-        <p15:guide id="34" orient="horz" pos="1461">
+        <p15:guide id="34" orient="horz" pos="1461" userDrawn="1">
           <p15:clr>
             <a:srgbClr val="A4A3A4"/>
           </p15:clr>
         </p15:guide>
-        <p15:guide id="35" orient="horz" pos="2262">
+        <p15:guide id="35" orient="horz" pos="2262" userDrawn="1">
           <p15:clr>
             <a:srgbClr val="A4A3A4"/>
           </p15:clr>
         </p15:guide>
-        <p15:guide id="36" orient="horz" pos="3072">
+        <p15:guide id="36" orient="horz" pos="3072" userDrawn="1">
           <p15:clr>
             <a:srgbClr val="A4A3A4"/>
           </p15:clr>
         </p15:guide>
-        <p15:guide id="37" pos="765">
+        <p15:guide id="37" pos="1020" userDrawn="1">
           <p15:clr>
             <a:srgbClr val="A4A3A4"/>
           </p15:clr>
         </p15:guide>
-        <p15:guide id="38" pos="5580">
+        <p15:guide id="38" pos="7440" userDrawn="1">
           <p15:clr>
             <a:srgbClr val="A4A3A4"/>
           </p15:clr>
         </p15:guide>
-        <p15:guide id="39" pos="5039">
+        <p15:guide id="39" pos="6719" userDrawn="1">
           <p15:clr>
             <a:srgbClr val="A4A3A4"/>
           </p15:clr>
         </p15:guide>
-        <p15:guide id="40" orient="horz" pos="621">
+        <p15:guide id="40" orient="horz" pos="621" userDrawn="1">
           <p15:clr>
             <a:srgbClr val="A4A3A4"/>
           </p15:clr>
         </p15:guide>
-        <p15:guide id="41" orient="horz" pos="38">
+        <p15:guide id="41" orient="horz" pos="38" userDrawn="1">
           <p15:clr>
             <a:srgbClr val="A4A3A4"/>
           </p15:clr>
         </p15:guide>
-        <p15:guide id="42" orient="horz" pos="4319">
+        <p15:guide id="42" orient="horz" pos="4319" userDrawn="1">
           <p15:clr>
             <a:srgbClr val="A4A3A4"/>
           </p15:clr>
         </p15:guide>
-        <p15:guide id="43" orient="horz" pos="39">
+        <p15:guide id="43" orient="horz" pos="39" userDrawn="1">
           <p15:clr>
             <a:srgbClr val="A4A3A4"/>
           </p15:clr>
         </p15:guide>
-        <p15:guide id="44" pos="3367">
+        <p15:guide id="44" pos="4489" userDrawn="1">
           <p15:clr>
             <a:srgbClr val="A4A3A4"/>
           </p15:clr>
         </p15:guide>
-        <p15:guide id="45" pos="4655">
+        <p15:guide id="45" pos="6207" userDrawn="1">
           <p15:clr>
             <a:srgbClr val="A4A3A4"/>
           </p15:clr>
         </p15:guide>
-        <p15:guide id="46" orient="horz" pos="1">
+        <p15:guide id="46" orient="horz" pos="1" userDrawn="1">
           <p15:clr>
             <a:srgbClr val="A4A3A4"/>
           </p15:clr>
         </p15:guide>
-        <p15:guide id="47" orient="horz" pos="4067">
+        <p15:guide id="47" orient="horz" pos="4067" userDrawn="1">
           <p15:clr>
             <a:srgbClr val="A4A3A4"/>
           </p15:clr>
         </p15:guide>
-        <p15:guide id="48" orient="horz" pos="601">
+        <p15:guide id="48" orient="horz" pos="601" userDrawn="1">
           <p15:clr>
             <a:srgbClr val="A4A3A4"/>
           </p15:clr>
         </p15:guide>
-        <p15:guide id="49" pos="149">
+        <p15:guide id="49" pos="199" userDrawn="1">
           <p15:clr>
             <a:srgbClr val="A4A3A4"/>
           </p15:clr>
         </p15:guide>
-        <p15:guide id="50" pos="5589">
+        <p15:guide id="50" pos="7452" userDrawn="1">
           <p15:clr>
             <a:srgbClr val="A4A3A4"/>
           </p15:clr>
         </p15:guide>
-        <p15:guide id="51" pos="3227">
+        <p15:guide id="51" pos="4303" userDrawn="1">
           <p15:clr>
             <a:srgbClr val="A4A3A4"/>
           </p15:clr>
@@ -7803,8 +7803,8 @@
         </p:nvSpPr>
         <p:spPr bwMode="auto">
           <a:xfrm>
-            <a:off x="993775" y="768350"/>
-            <a:ext cx="5116513" cy="3836988"/>
+            <a:off x="142875" y="768350"/>
+            <a:ext cx="6818313" cy="3836988"/>
           </a:xfrm>
           <a:prstGeom prst="rect">
             <a:avLst/>
@@ -7827,7 +7827,7 @@
               </a14:hiddenFill>
             </a:ext>
             <a:ext uri="{FAA26D3D-D897-4be2-8F04-BA451C77F1D7}">
-              <ma14:placeholderFlag xmlns="" xmlns:ma14="http://schemas.microsoft.com/office/mac/drawingml/2011/main" val="1"/>
+              <ma14:placeholderFlag xmlns:ma14="http://schemas.microsoft.com/office/mac/drawingml/2011/main" xmlns="" val="1"/>
             </a:ext>
           </a:extLst>
         </p:spPr>
@@ -8176,6 +8176,10 @@
           </p:nvPr>
         </p:nvSpPr>
         <p:spPr>
+          <a:xfrm>
+            <a:off x="142875" y="768350"/>
+            <a:ext cx="6818313" cy="3836988"/>
+          </a:xfrm>
           <a:ln/>
         </p:spPr>
       </p:sp>
@@ -8211,7 +8215,7 @@
               </a14:hiddenLine>
             </a:ext>
             <a:ext uri="{FAA26D3D-D897-4be2-8F04-BA451C77F1D7}">
-              <ma14:placeholderFlag xmlns="" xmlns:ma14="http://schemas.microsoft.com/office/mac/drawingml/2011/main" val="1"/>
+              <ma14:placeholderFlag xmlns:ma14="http://schemas.microsoft.com/office/mac/drawingml/2011/main" xmlns="" val="1"/>
             </a:ext>
           </a:extLst>
         </p:spPr>
@@ -8376,7 +8380,12 @@
             <p:ph type="sldImg"/>
           </p:nvPr>
         </p:nvSpPr>
-        <p:spPr/>
+        <p:spPr>
+          <a:xfrm>
+            <a:off x="142875" y="768350"/>
+            <a:ext cx="6818313" cy="3836988"/>
+          </a:xfrm>
+        </p:spPr>
       </p:sp>
       <p:sp>
         <p:nvSpPr>
@@ -8437,7 +8446,12 @@
             <p:ph type="sldImg"/>
           </p:nvPr>
         </p:nvSpPr>
-        <p:spPr/>
+        <p:spPr>
+          <a:xfrm>
+            <a:off x="142875" y="768350"/>
+            <a:ext cx="6818313" cy="3836988"/>
+          </a:xfrm>
+        </p:spPr>
       </p:sp>
       <p:sp>
         <p:nvSpPr>
@@ -8498,7 +8512,12 @@
             <p:ph type="sldImg"/>
           </p:nvPr>
         </p:nvSpPr>
-        <p:spPr/>
+        <p:spPr>
+          <a:xfrm>
+            <a:off x="142875" y="768350"/>
+            <a:ext cx="6818313" cy="3836988"/>
+          </a:xfrm>
+        </p:spPr>
       </p:sp>
       <p:sp>
         <p:nvSpPr>
@@ -8571,7 +8590,12 @@
             <p:ph type="sldImg"/>
           </p:nvPr>
         </p:nvSpPr>
-        <p:spPr/>
+        <p:spPr>
+          <a:xfrm>
+            <a:off x="142875" y="768350"/>
+            <a:ext cx="6818313" cy="3836988"/>
+          </a:xfrm>
+        </p:spPr>
       </p:sp>
       <p:sp>
         <p:nvSpPr>
@@ -8638,7 +8662,12 @@
             <p:ph type="sldImg"/>
           </p:nvPr>
         </p:nvSpPr>
-        <p:spPr/>
+        <p:spPr>
+          <a:xfrm>
+            <a:off x="142875" y="768350"/>
+            <a:ext cx="6818313" cy="3836988"/>
+          </a:xfrm>
+        </p:spPr>
       </p:sp>
       <p:sp>
         <p:nvSpPr>
@@ -8699,7 +8728,12 @@
             <p:ph type="sldImg"/>
           </p:nvPr>
         </p:nvSpPr>
-        <p:spPr/>
+        <p:spPr>
+          <a:xfrm>
+            <a:off x="142875" y="768350"/>
+            <a:ext cx="6818313" cy="3836988"/>
+          </a:xfrm>
+        </p:spPr>
       </p:sp>
       <p:sp>
         <p:nvSpPr>
@@ -8792,7 +8826,12 @@
             <p:ph type="sldImg"/>
           </p:nvPr>
         </p:nvSpPr>
-        <p:spPr/>
+        <p:spPr>
+          <a:xfrm>
+            <a:off x="142875" y="768350"/>
+            <a:ext cx="6818313" cy="3836988"/>
+          </a:xfrm>
+        </p:spPr>
       </p:sp>
       <p:sp>
         <p:nvSpPr>
@@ -8853,7 +8892,12 @@
             <p:ph type="sldImg"/>
           </p:nvPr>
         </p:nvSpPr>
-        <p:spPr/>
+        <p:spPr>
+          <a:xfrm>
+            <a:off x="142875" y="768350"/>
+            <a:ext cx="6818313" cy="3836988"/>
+          </a:xfrm>
+        </p:spPr>
       </p:sp>
       <p:sp>
         <p:nvSpPr>
@@ -8921,7 +8965,12 @@
             <p:ph type="sldImg"/>
           </p:nvPr>
         </p:nvSpPr>
-        <p:spPr/>
+        <p:spPr>
+          <a:xfrm>
+            <a:off x="142875" y="768350"/>
+            <a:ext cx="6818313" cy="3836988"/>
+          </a:xfrm>
+        </p:spPr>
       </p:sp>
       <p:sp>
         <p:nvSpPr>
@@ -8982,7 +9031,12 @@
             <p:ph type="sldImg"/>
           </p:nvPr>
         </p:nvSpPr>
-        <p:spPr/>
+        <p:spPr>
+          <a:xfrm>
+            <a:off x="142875" y="768350"/>
+            <a:ext cx="6818313" cy="3836988"/>
+          </a:xfrm>
+        </p:spPr>
       </p:sp>
       <p:sp>
         <p:nvSpPr>
@@ -9043,7 +9097,12 @@
             <p:ph type="sldImg"/>
           </p:nvPr>
         </p:nvSpPr>
-        <p:spPr/>
+        <p:spPr>
+          <a:xfrm>
+            <a:off x="142875" y="768350"/>
+            <a:ext cx="6818313" cy="3836988"/>
+          </a:xfrm>
+        </p:spPr>
       </p:sp>
       <p:sp>
         <p:nvSpPr>
@@ -9116,7 +9175,12 @@
             <p:ph type="sldImg"/>
           </p:nvPr>
         </p:nvSpPr>
-        <p:spPr/>
+        <p:spPr>
+          <a:xfrm>
+            <a:off x="142875" y="768350"/>
+            <a:ext cx="6818313" cy="3836988"/>
+          </a:xfrm>
+        </p:spPr>
       </p:sp>
       <p:sp>
         <p:nvSpPr>
@@ -9183,7 +9247,12 @@
             <p:ph type="sldImg"/>
           </p:nvPr>
         </p:nvSpPr>
-        <p:spPr/>
+        <p:spPr>
+          <a:xfrm>
+            <a:off x="142875" y="768350"/>
+            <a:ext cx="6818313" cy="3836988"/>
+          </a:xfrm>
+        </p:spPr>
       </p:sp>
       <p:sp>
         <p:nvSpPr>
@@ -9253,7 +9322,7 @@
         <p:spPr bwMode="auto">
           <a:xfrm>
             <a:off x="0" y="2276475"/>
-            <a:ext cx="9144000" cy="2665413"/>
+            <a:ext cx="12192000" cy="369332"/>
           </a:xfrm>
           <a:prstGeom prst="rect">
             <a:avLst/>
@@ -9380,7 +9449,7 @@
             <a:pPr>
               <a:defRPr/>
             </a:pPr>
-            <a:endParaRPr kumimoji="0" lang="zh-CN" altLang="en-US">
+            <a:endParaRPr kumimoji="0" lang="zh-CN" altLang="en-US" sz="2400">
               <a:solidFill>
                 <a:prstClr val="white"/>
               </a:solidFill>
@@ -9400,7 +9469,7 @@
         <p:spPr bwMode="auto">
           <a:xfrm>
             <a:off x="0" y="2203450"/>
-            <a:ext cx="9144000" cy="71438"/>
+            <a:ext cx="12192000" cy="369332"/>
           </a:xfrm>
           <a:prstGeom prst="rect">
             <a:avLst/>
@@ -9527,7 +9596,7 @@
             <a:pPr>
               <a:defRPr/>
             </a:pPr>
-            <a:endParaRPr kumimoji="0" lang="zh-CN" altLang="en-US">
+            <a:endParaRPr kumimoji="0" lang="zh-CN" altLang="en-US" sz="2400">
               <a:solidFill>
                 <a:prstClr val="white"/>
               </a:solidFill>
@@ -9547,7 +9616,7 @@
         <p:spPr bwMode="auto">
           <a:xfrm>
             <a:off x="0" y="4870450"/>
-            <a:ext cx="9144000" cy="71438"/>
+            <a:ext cx="12192000" cy="369332"/>
           </a:xfrm>
           <a:prstGeom prst="rect">
             <a:avLst/>
@@ -9674,7 +9743,7 @@
             <a:pPr>
               <a:defRPr/>
             </a:pPr>
-            <a:endParaRPr kumimoji="0" lang="zh-CN" altLang="en-US">
+            <a:endParaRPr kumimoji="0" lang="zh-CN" altLang="en-US" sz="2400">
               <a:solidFill>
                 <a:prstClr val="white"/>
               </a:solidFill>
@@ -9695,8 +9764,8 @@
         </p:nvSpPr>
         <p:spPr>
           <a:xfrm>
-            <a:off x="1828800" y="1828800"/>
-            <a:ext cx="6934200" cy="2362200"/>
+            <a:off x="2438400" y="1828800"/>
+            <a:ext cx="9245600" cy="2362200"/>
           </a:xfrm>
           <a:noFill/>
         </p:spPr>
@@ -9727,8 +9796,8 @@
         </p:nvSpPr>
         <p:spPr>
           <a:xfrm>
-            <a:off x="1828800" y="4572000"/>
-            <a:ext cx="6934200" cy="1295400"/>
+            <a:off x="2438400" y="4572000"/>
+            <a:ext cx="9245600" cy="1295400"/>
           </a:xfrm>
           <a:prstGeom prst="rect">
             <a:avLst/>
@@ -9841,8 +9910,8 @@
         </p:nvSpPr>
         <p:spPr>
           <a:xfrm>
-            <a:off x="287338" y="981075"/>
-            <a:ext cx="7772400" cy="5184775"/>
+            <a:off x="383117" y="981076"/>
+            <a:ext cx="10363200" cy="5184775"/>
           </a:xfrm>
           <a:prstGeom prst="rect">
             <a:avLst/>
@@ -9956,8 +10025,8 @@
         </p:nvSpPr>
         <p:spPr>
           <a:xfrm>
-            <a:off x="6858000" y="-26988"/>
-            <a:ext cx="2286000" cy="6192838"/>
+            <a:off x="9144000" y="-26988"/>
+            <a:ext cx="3048000" cy="6192838"/>
           </a:xfrm>
         </p:spPr>
         <p:txBody>
@@ -9984,7 +10053,7 @@
         <p:spPr>
           <a:xfrm>
             <a:off x="0" y="-26988"/>
-            <a:ext cx="6705600" cy="6192838"/>
+            <a:ext cx="8940800" cy="6192838"/>
           </a:xfrm>
           <a:prstGeom prst="rect">
             <a:avLst/>
@@ -10099,7 +10168,7 @@
         <p:spPr>
           <a:xfrm>
             <a:off x="0" y="-26988"/>
-            <a:ext cx="9144000" cy="6192838"/>
+            <a:ext cx="12192000" cy="6192838"/>
           </a:xfrm>
           <a:prstGeom prst="rect">
             <a:avLst/>
@@ -10214,7 +10283,7 @@
         <p:spPr>
           <a:xfrm>
             <a:off x="0" y="-26988"/>
-            <a:ext cx="9144000" cy="792163"/>
+            <a:ext cx="12192000" cy="792163"/>
           </a:xfrm>
         </p:spPr>
         <p:txBody>
@@ -10240,8 +10309,8 @@
         </p:nvSpPr>
         <p:spPr>
           <a:xfrm>
-            <a:off x="685800" y="981075"/>
-            <a:ext cx="7772400" cy="5184775"/>
+            <a:off x="914400" y="981076"/>
+            <a:ext cx="10363200" cy="5184775"/>
           </a:xfrm>
           <a:prstGeom prst="rect">
             <a:avLst/>
@@ -10325,7 +10394,7 @@
         <p:spPr>
           <a:xfrm>
             <a:off x="0" y="-26988"/>
-            <a:ext cx="9144000" cy="792163"/>
+            <a:ext cx="12192000" cy="792163"/>
           </a:xfrm>
         </p:spPr>
         <p:txBody>
@@ -10351,8 +10420,8 @@
         </p:nvSpPr>
         <p:spPr>
           <a:xfrm>
-            <a:off x="685800" y="981075"/>
-            <a:ext cx="3810000" cy="5184775"/>
+            <a:off x="914400" y="981076"/>
+            <a:ext cx="5080000" cy="5184775"/>
           </a:xfrm>
           <a:prstGeom prst="rect">
             <a:avLst/>
@@ -10410,8 +10479,8 @@
         </p:nvSpPr>
         <p:spPr>
           <a:xfrm>
-            <a:off x="4648200" y="981075"/>
-            <a:ext cx="3810000" cy="5184775"/>
+            <a:off x="6197600" y="981076"/>
+            <a:ext cx="5080000" cy="5184775"/>
           </a:xfrm>
           <a:prstGeom prst="rect">
             <a:avLst/>
@@ -10531,7 +10600,7 @@
         <p:spPr bwMode="auto">
           <a:xfrm>
             <a:off x="0" y="-1"/>
-            <a:ext cx="9144000" cy="6858001"/>
+            <a:ext cx="12192000" cy="6858001"/>
           </a:xfrm>
           <a:prstGeom prst="rect">
             <a:avLst/>
@@ -10552,7 +10621,7 @@
         <p:spPr>
           <a:xfrm>
             <a:off x="0" y="0"/>
-            <a:ext cx="9144000" cy="1071546"/>
+            <a:ext cx="12192000" cy="1071546"/>
           </a:xfrm>
           <a:prstGeom prst="rect">
             <a:avLst/>
@@ -10658,8 +10727,8 @@
         </p:nvSpPr>
         <p:spPr>
           <a:xfrm>
-            <a:off x="457200" y="6356350"/>
-            <a:ext cx="2133600" cy="365125"/>
+            <a:off x="609600" y="6356351"/>
+            <a:ext cx="2844800" cy="365125"/>
           </a:xfrm>
           <a:prstGeom prst="rect">
             <a:avLst/>
@@ -10691,8 +10760,8 @@
         </p:nvSpPr>
         <p:spPr>
           <a:xfrm>
-            <a:off x="3124200" y="6356350"/>
-            <a:ext cx="2895600" cy="365125"/>
+            <a:off x="4165600" y="6356351"/>
+            <a:ext cx="3860800" cy="365125"/>
           </a:xfrm>
           <a:prstGeom prst="rect">
             <a:avLst/>
@@ -10757,8 +10826,8 @@
         </p:nvSpPr>
         <p:spPr>
           <a:xfrm>
-            <a:off x="457200" y="6356350"/>
-            <a:ext cx="2133600" cy="365125"/>
+            <a:off x="609600" y="6356351"/>
+            <a:ext cx="2844800" cy="365125"/>
           </a:xfrm>
           <a:prstGeom prst="rect">
             <a:avLst/>
@@ -10790,8 +10859,8 @@
         </p:nvSpPr>
         <p:spPr>
           <a:xfrm>
-            <a:off x="3124200" y="6356350"/>
-            <a:ext cx="2895600" cy="365125"/>
+            <a:off x="4165600" y="6356351"/>
+            <a:ext cx="3860800" cy="365125"/>
           </a:xfrm>
           <a:prstGeom prst="rect">
             <a:avLst/>
@@ -10856,8 +10925,8 @@
         </p:nvSpPr>
         <p:spPr>
           <a:xfrm>
-            <a:off x="6982264" y="6467404"/>
-            <a:ext cx="2133600" cy="365125"/>
+            <a:off x="9309685" y="6467405"/>
+            <a:ext cx="2844800" cy="365125"/>
           </a:xfrm>
           <a:prstGeom prst="rect">
             <a:avLst/>
@@ -10913,7 +10982,7 @@
         <p:spPr>
           <a:xfrm>
             <a:off x="0" y="6395396"/>
-            <a:ext cx="9144000" cy="0"/>
+            <a:ext cx="12192000" cy="0"/>
           </a:xfrm>
           <a:custGeom>
             <a:avLst/>
@@ -10982,7 +11051,7 @@
                 <a:spcPts val="0"/>
               </a:spcAft>
             </a:pPr>
-            <a:endParaRPr lang="zh-CN" altLang="en-US">
+            <a:endParaRPr lang="zh-CN" altLang="en-US" sz="2400">
               <a:solidFill>
                 <a:prstClr val="white"/>
               </a:solidFill>
@@ -11002,8 +11071,8 @@
         </p:nvSpPr>
         <p:spPr bwMode="auto">
           <a:xfrm>
-            <a:off x="0" y="8526"/>
-            <a:ext cx="8024813" cy="792162"/>
+            <a:off x="1" y="8526"/>
+            <a:ext cx="10699751" cy="792162"/>
           </a:xfrm>
           <a:prstGeom prst="rect">
             <a:avLst/>
@@ -11031,7 +11100,7 @@
               </a14:hiddenLine>
             </a:ext>
             <a:ext uri="{FAA26D3D-D897-4be2-8F04-BA451C77F1D7}">
-              <ma14:placeholderFlag xmlns="" xmlns:ma14="http://schemas.microsoft.com/office/mac/drawingml/2011/main" val="1"/>
+              <ma14:placeholderFlag xmlns:ma14="http://schemas.microsoft.com/office/mac/drawingml/2011/main" xmlns="" val="1"/>
             </a:ext>
           </a:extLst>
         </p:spPr>
@@ -11096,8 +11165,8 @@
         </p:nvSpPr>
         <p:spPr>
           <a:xfrm>
-            <a:off x="685800" y="2130425"/>
-            <a:ext cx="7772400" cy="1470025"/>
+            <a:off x="914400" y="2130426"/>
+            <a:ext cx="10363200" cy="1470025"/>
           </a:xfrm>
         </p:spPr>
         <p:txBody>
@@ -11123,8 +11192,8 @@
         </p:nvSpPr>
         <p:spPr>
           <a:xfrm>
-            <a:off x="1371600" y="3886200"/>
-            <a:ext cx="6400800" cy="1752600"/>
+            <a:off x="1828800" y="3886200"/>
+            <a:ext cx="8534400" cy="609398"/>
           </a:xfrm>
         </p:spPr>
         <p:txBody>
@@ -11255,8 +11324,8 @@
         </p:nvSpPr>
         <p:spPr>
           <a:xfrm>
-            <a:off x="287338" y="981075"/>
-            <a:ext cx="7772400" cy="5184775"/>
+            <a:off x="383117" y="981076"/>
+            <a:ext cx="10363200" cy="5184775"/>
           </a:xfrm>
           <a:prstGeom prst="rect">
             <a:avLst/>
@@ -11542,8 +11611,8 @@
         </p:nvSpPr>
         <p:spPr>
           <a:xfrm>
-            <a:off x="722313" y="4406900"/>
-            <a:ext cx="7772400" cy="1362075"/>
+            <a:off x="963084" y="4406901"/>
+            <a:ext cx="10363200" cy="1362075"/>
           </a:xfrm>
         </p:spPr>
         <p:txBody>
@@ -11573,8 +11642,8 @@
         </p:nvSpPr>
         <p:spPr>
           <a:xfrm>
-            <a:off x="722313" y="2906713"/>
-            <a:ext cx="7772400" cy="1500187"/>
+            <a:off x="963084" y="3945235"/>
+            <a:ext cx="10363200" cy="461665"/>
           </a:xfrm>
         </p:spPr>
         <p:txBody>
@@ -11728,8 +11797,8 @@
         </p:nvSpPr>
         <p:spPr>
           <a:xfrm>
-            <a:off x="325438" y="1087438"/>
-            <a:ext cx="4027487" cy="2270125"/>
+            <a:off x="433918" y="1087439"/>
+            <a:ext cx="5369983" cy="2332946"/>
           </a:xfrm>
         </p:spPr>
         <p:txBody>
@@ -11812,8 +11881,8 @@
         </p:nvSpPr>
         <p:spPr>
           <a:xfrm>
-            <a:off x="4505325" y="1087438"/>
-            <a:ext cx="4027488" cy="2270125"/>
+            <a:off x="6007100" y="1087439"/>
+            <a:ext cx="5369984" cy="2332946"/>
           </a:xfrm>
         </p:spPr>
         <p:txBody>
@@ -11964,8 +12033,8 @@
         </p:nvSpPr>
         <p:spPr>
           <a:xfrm>
-            <a:off x="457200" y="274638"/>
-            <a:ext cx="8229600" cy="1143000"/>
+            <a:off x="609600" y="274638"/>
+            <a:ext cx="10972800" cy="1143000"/>
           </a:xfrm>
         </p:spPr>
         <p:txBody>
@@ -11995,8 +12064,8 @@
         </p:nvSpPr>
         <p:spPr>
           <a:xfrm>
-            <a:off x="457200" y="1535113"/>
-            <a:ext cx="4040188" cy="639762"/>
+            <a:off x="609600" y="1639344"/>
+            <a:ext cx="5386917" cy="535531"/>
           </a:xfrm>
         </p:spPr>
         <p:txBody>
@@ -12060,8 +12129,8 @@
         </p:nvSpPr>
         <p:spPr>
           <a:xfrm>
-            <a:off x="457200" y="2174875"/>
-            <a:ext cx="4040188" cy="3951288"/>
+            <a:off x="609600" y="2174875"/>
+            <a:ext cx="5386917" cy="2043636"/>
           </a:xfrm>
         </p:spPr>
         <p:txBody>
@@ -12144,8 +12213,8 @@
         </p:nvSpPr>
         <p:spPr>
           <a:xfrm>
-            <a:off x="4645025" y="1535113"/>
-            <a:ext cx="4041775" cy="639762"/>
+            <a:off x="6193368" y="1639344"/>
+            <a:ext cx="5389033" cy="535531"/>
           </a:xfrm>
         </p:spPr>
         <p:txBody>
@@ -12209,8 +12278,8 @@
         </p:nvSpPr>
         <p:spPr>
           <a:xfrm>
-            <a:off x="4645025" y="2174875"/>
-            <a:ext cx="4041775" cy="3951288"/>
+            <a:off x="6193368" y="2174875"/>
+            <a:ext cx="5389033" cy="2043636"/>
           </a:xfrm>
         </p:spPr>
         <p:txBody>
@@ -12519,8 +12588,8 @@
         </p:nvSpPr>
         <p:spPr>
           <a:xfrm>
-            <a:off x="457200" y="273050"/>
-            <a:ext cx="3008313" cy="1162050"/>
+            <a:off x="609601" y="273050"/>
+            <a:ext cx="4011084" cy="1162050"/>
           </a:xfrm>
         </p:spPr>
         <p:txBody>
@@ -12550,8 +12619,8 @@
         </p:nvSpPr>
         <p:spPr>
           <a:xfrm>
-            <a:off x="3575050" y="273050"/>
-            <a:ext cx="5111750" cy="5853113"/>
+            <a:off x="4766733" y="273051"/>
+            <a:ext cx="6815667" cy="2665345"/>
           </a:xfrm>
         </p:spPr>
         <p:txBody>
@@ -12634,8 +12703,8 @@
         </p:nvSpPr>
         <p:spPr>
           <a:xfrm>
-            <a:off x="457200" y="1435100"/>
-            <a:ext cx="3008313" cy="4691063"/>
+            <a:off x="609601" y="1435101"/>
+            <a:ext cx="4011084" cy="350865"/>
           </a:xfrm>
         </p:spPr>
         <p:txBody>
@@ -12767,8 +12836,8 @@
         </p:nvSpPr>
         <p:spPr>
           <a:xfrm>
-            <a:off x="1792288" y="4800600"/>
-            <a:ext cx="5486400" cy="566738"/>
+            <a:off x="2389717" y="4800600"/>
+            <a:ext cx="7315200" cy="566738"/>
           </a:xfrm>
         </p:spPr>
         <p:txBody>
@@ -12798,8 +12867,8 @@
         </p:nvSpPr>
         <p:spPr>
           <a:xfrm>
-            <a:off x="1792288" y="612775"/>
-            <a:ext cx="5486400" cy="4114800"/>
+            <a:off x="2389717" y="612775"/>
+            <a:ext cx="7315200" cy="683264"/>
           </a:xfrm>
         </p:spPr>
         <p:txBody>
@@ -12860,8 +12929,8 @@
         </p:nvSpPr>
         <p:spPr>
           <a:xfrm>
-            <a:off x="1792288" y="5367338"/>
-            <a:ext cx="5486400" cy="804862"/>
+            <a:off x="2389717" y="5367338"/>
+            <a:ext cx="7315200" cy="350865"/>
           </a:xfrm>
         </p:spPr>
         <p:txBody>
@@ -13013,7 +13082,12 @@
             <p:ph type="body" orient="vert" idx="1"/>
           </p:nvPr>
         </p:nvSpPr>
-        <p:spPr/>
+        <p:spPr>
+          <a:xfrm>
+            <a:off x="7917676" y="1087439"/>
+            <a:ext cx="3459409" cy="2332946"/>
+          </a:xfrm>
+        </p:spPr>
         <p:txBody>
           <a:bodyPr vert="eaVert"/>
           <a:lstStyle/>
@@ -13134,8 +13208,8 @@
         </p:nvSpPr>
         <p:spPr>
           <a:xfrm>
-            <a:off x="6507163" y="115888"/>
-            <a:ext cx="2168525" cy="3241675"/>
+            <a:off x="8676218" y="115889"/>
+            <a:ext cx="2891367" cy="3241675"/>
           </a:xfrm>
         </p:spPr>
         <p:txBody>
@@ -13161,8 +13235,8 @@
         </p:nvSpPr>
         <p:spPr>
           <a:xfrm>
-            <a:off x="0" y="115888"/>
-            <a:ext cx="6354763" cy="3241675"/>
+            <a:off x="5530674" y="115889"/>
+            <a:ext cx="2942344" cy="3241675"/>
           </a:xfrm>
         </p:spPr>
         <p:txBody>
@@ -13285,8 +13359,8 @@
         </p:nvSpPr>
         <p:spPr>
           <a:xfrm>
-            <a:off x="722313" y="4406900"/>
-            <a:ext cx="7772400" cy="1362075"/>
+            <a:off x="963084" y="4406901"/>
+            <a:ext cx="10363200" cy="1362075"/>
           </a:xfrm>
         </p:spPr>
         <p:txBody>
@@ -13316,8 +13390,8 @@
         </p:nvSpPr>
         <p:spPr>
           <a:xfrm>
-            <a:off x="722313" y="2906713"/>
-            <a:ext cx="7772400" cy="1500187"/>
+            <a:off x="963084" y="2906713"/>
+            <a:ext cx="10363200" cy="1500187"/>
           </a:xfrm>
           <a:prstGeom prst="rect">
             <a:avLst/>
@@ -13440,8 +13514,8 @@
         </p:nvSpPr>
         <p:spPr>
           <a:xfrm>
-            <a:off x="685800" y="981075"/>
-            <a:ext cx="3810000" cy="5184775"/>
+            <a:off x="914400" y="981076"/>
+            <a:ext cx="5080000" cy="5184775"/>
           </a:xfrm>
           <a:prstGeom prst="rect">
             <a:avLst/>
@@ -13527,8 +13601,8 @@
         </p:nvSpPr>
         <p:spPr>
           <a:xfrm>
-            <a:off x="4648200" y="981075"/>
-            <a:ext cx="3810000" cy="5184775"/>
+            <a:off x="6197600" y="981076"/>
+            <a:ext cx="5080000" cy="5184775"/>
           </a:xfrm>
           <a:prstGeom prst="rect">
             <a:avLst/>
@@ -13692,8 +13766,8 @@
         </p:nvSpPr>
         <p:spPr>
           <a:xfrm>
-            <a:off x="457200" y="274638"/>
-            <a:ext cx="8229600" cy="1143000"/>
+            <a:off x="609600" y="274638"/>
+            <a:ext cx="10972800" cy="1143000"/>
           </a:xfrm>
         </p:spPr>
         <p:txBody>
@@ -13723,8 +13797,8 @@
         </p:nvSpPr>
         <p:spPr>
           <a:xfrm>
-            <a:off x="457200" y="1535113"/>
-            <a:ext cx="4040188" cy="639762"/>
+            <a:off x="609600" y="1535113"/>
+            <a:ext cx="5386917" cy="639762"/>
           </a:xfrm>
           <a:prstGeom prst="rect">
             <a:avLst/>
@@ -13791,8 +13865,8 @@
         </p:nvSpPr>
         <p:spPr>
           <a:xfrm>
-            <a:off x="457200" y="2174875"/>
-            <a:ext cx="4040188" cy="3951288"/>
+            <a:off x="609600" y="2174875"/>
+            <a:ext cx="5386917" cy="3951288"/>
           </a:xfrm>
           <a:prstGeom prst="rect">
             <a:avLst/>
@@ -13878,8 +13952,8 @@
         </p:nvSpPr>
         <p:spPr>
           <a:xfrm>
-            <a:off x="4645025" y="1535113"/>
-            <a:ext cx="4041775" cy="639762"/>
+            <a:off x="6193368" y="1535113"/>
+            <a:ext cx="5389033" cy="639762"/>
           </a:xfrm>
           <a:prstGeom prst="rect">
             <a:avLst/>
@@ -13946,8 +14020,8 @@
         </p:nvSpPr>
         <p:spPr>
           <a:xfrm>
-            <a:off x="4645025" y="2174875"/>
-            <a:ext cx="4041775" cy="3951288"/>
+            <a:off x="6193368" y="2174875"/>
+            <a:ext cx="5389033" cy="3951288"/>
           </a:xfrm>
           <a:prstGeom prst="rect">
             <a:avLst/>
@@ -14223,8 +14297,8 @@
         </p:nvSpPr>
         <p:spPr>
           <a:xfrm>
-            <a:off x="457200" y="273050"/>
-            <a:ext cx="3008313" cy="1162050"/>
+            <a:off x="609601" y="273050"/>
+            <a:ext cx="4011084" cy="1162050"/>
           </a:xfrm>
         </p:spPr>
         <p:txBody>
@@ -14254,8 +14328,8 @@
         </p:nvSpPr>
         <p:spPr>
           <a:xfrm>
-            <a:off x="3575050" y="273050"/>
-            <a:ext cx="5111750" cy="5853113"/>
+            <a:off x="4766733" y="273051"/>
+            <a:ext cx="6815667" cy="5853113"/>
           </a:xfrm>
           <a:prstGeom prst="rect">
             <a:avLst/>
@@ -14341,8 +14415,8 @@
         </p:nvSpPr>
         <p:spPr>
           <a:xfrm>
-            <a:off x="457200" y="1435100"/>
-            <a:ext cx="3008313" cy="4691063"/>
+            <a:off x="609601" y="1435101"/>
+            <a:ext cx="4011084" cy="4691063"/>
           </a:xfrm>
           <a:prstGeom prst="rect">
             <a:avLst/>
@@ -14465,8 +14539,8 @@
         </p:nvSpPr>
         <p:spPr>
           <a:xfrm>
-            <a:off x="1792288" y="4800600"/>
-            <a:ext cx="5486400" cy="566738"/>
+            <a:off x="2389717" y="4800600"/>
+            <a:ext cx="7315200" cy="566738"/>
           </a:xfrm>
         </p:spPr>
         <p:txBody>
@@ -14496,8 +14570,8 @@
         </p:nvSpPr>
         <p:spPr>
           <a:xfrm>
-            <a:off x="1792288" y="612775"/>
-            <a:ext cx="5486400" cy="4114800"/>
+            <a:off x="2389717" y="612775"/>
+            <a:ext cx="7315200" cy="4114800"/>
           </a:xfrm>
           <a:prstGeom prst="rect">
             <a:avLst/>
@@ -14561,8 +14635,8 @@
         </p:nvSpPr>
         <p:spPr>
           <a:xfrm>
-            <a:off x="1792288" y="5367338"/>
-            <a:ext cx="5486400" cy="804862"/>
+            <a:off x="2389717" y="5367338"/>
+            <a:ext cx="7315200" cy="804862"/>
           </a:xfrm>
           <a:prstGeom prst="rect">
             <a:avLst/>
@@ -14693,8 +14767,8 @@
         </p:nvSpPr>
         <p:spPr bwMode="auto">
           <a:xfrm>
-            <a:off x="182850" y="8526"/>
-            <a:ext cx="8024813" cy="792162"/>
+            <a:off x="243801" y="8526"/>
+            <a:ext cx="10699751" cy="792162"/>
           </a:xfrm>
           <a:prstGeom prst="rect">
             <a:avLst/>
@@ -14722,7 +14796,7 @@
               </a14:hiddenLine>
             </a:ext>
             <a:ext uri="{FAA26D3D-D897-4be2-8F04-BA451C77F1D7}">
-              <ma14:placeholderFlag xmlns="" xmlns:ma14="http://schemas.microsoft.com/office/mac/drawingml/2011/main" val="1"/>
+              <ma14:placeholderFlag xmlns:ma14="http://schemas.microsoft.com/office/mac/drawingml/2011/main" xmlns="" val="1"/>
             </a:ext>
           </a:extLst>
         </p:spPr>
@@ -14750,8 +14824,8 @@
         </p:nvSpPr>
         <p:spPr>
           <a:xfrm rot="5400000">
-            <a:off x="4513516" y="-3740963"/>
-            <a:ext cx="72000" cy="9099032"/>
+            <a:off x="6030021" y="-5257469"/>
+            <a:ext cx="72000" cy="12132043"/>
           </a:xfrm>
           <a:prstGeom prst="round2SameRect">
             <a:avLst>
@@ -14810,8 +14884,8 @@
         </p:nvSpPr>
         <p:spPr>
           <a:xfrm rot="5400000" flipH="1">
-            <a:off x="8530149" y="230704"/>
-            <a:ext cx="72000" cy="1155701"/>
+            <a:off x="11385532" y="38088"/>
+            <a:ext cx="72000" cy="1540935"/>
           </a:xfrm>
           <a:prstGeom prst="round2SameRect">
             <a:avLst>
@@ -14877,8 +14951,8 @@
         </p:nvSpPr>
         <p:spPr>
           <a:xfrm>
-            <a:off x="6553200" y="6356350"/>
-            <a:ext cx="2133600" cy="365125"/>
+            <a:off x="8737600" y="6356351"/>
+            <a:ext cx="2844800" cy="365125"/>
           </a:xfrm>
           <a:prstGeom prst="rect">
             <a:avLst/>
@@ -15390,8 +15464,8 @@
         </p:blipFill>
         <p:spPr bwMode="auto">
           <a:xfrm>
-            <a:off x="0" y="0"/>
-            <a:ext cx="9142413" cy="6856413"/>
+            <a:off x="1" y="1"/>
+            <a:ext cx="12189884" cy="6856413"/>
           </a:xfrm>
           <a:prstGeom prst="rect">
             <a:avLst/>
@@ -15417,8 +15491,8 @@
         </p:nvSpPr>
         <p:spPr bwMode="auto">
           <a:xfrm>
-            <a:off x="0" y="115888"/>
-            <a:ext cx="8675688" cy="649287"/>
+            <a:off x="0" y="115889"/>
+            <a:ext cx="11567584" cy="649287"/>
           </a:xfrm>
           <a:prstGeom prst="rect">
             <a:avLst/>
@@ -15465,8 +15539,8 @@
         </p:nvSpPr>
         <p:spPr bwMode="auto">
           <a:xfrm>
-            <a:off x="325438" y="1087438"/>
-            <a:ext cx="8207375" cy="2270125"/>
+            <a:off x="433918" y="1087439"/>
+            <a:ext cx="10943167" cy="2332946"/>
           </a:xfrm>
           <a:prstGeom prst="rect">
             <a:avLst/>
@@ -15591,8 +15665,8 @@
         </p:nvSpPr>
         <p:spPr bwMode="auto">
           <a:xfrm>
-            <a:off x="6902450" y="6499225"/>
-            <a:ext cx="2133600" cy="212725"/>
+            <a:off x="9203267" y="6499226"/>
+            <a:ext cx="2844800" cy="212725"/>
           </a:xfrm>
           <a:prstGeom prst="rect">
             <a:avLst/>
@@ -16153,8 +16227,8 @@
         </p:nvSpPr>
         <p:spPr bwMode="auto">
           <a:xfrm>
-            <a:off x="319693" y="1685331"/>
-            <a:ext cx="8501204" cy="1917543"/>
+            <a:off x="1368490" y="1685332"/>
+            <a:ext cx="9747379" cy="1917543"/>
           </a:xfrm>
           <a:prstGeom prst="rect">
             <a:avLst/>
@@ -16187,41 +16261,21 @@
           <a:bodyPr anchor="ctr"/>
           <a:lstStyle/>
           <a:p>
-            <a:pPr marL="0" marR="0" lvl="0" indent="0" algn="ctr" defTabSz="914400" rtl="0" eaLnBrk="1" fontAlgn="base" latinLnBrk="0" hangingPunct="1">
-              <a:lnSpc>
-                <a:spcPct val="100000"/>
-              </a:lnSpc>
-              <a:spcBef>
-                <a:spcPct val="50000"/>
-              </a:spcBef>
-              <a:spcAft>
-                <a:spcPct val="0"/>
-              </a:spcAft>
-              <a:buClrTx/>
-              <a:buSzTx/>
-              <a:buFontTx/>
-              <a:buNone/>
-              <a:tabLst/>
+            <a:pPr>
               <a:defRPr/>
             </a:pPr>
             <a:r>
-              <a:rPr kumimoji="0" lang="zh-CN" altLang="en-US" sz="4800" b="1" i="0" u="none" strike="noStrike" kern="1200" cap="none" spc="0" normalizeH="0" baseline="0" noProof="0" dirty="0">
-                <a:ln>
-                  <a:noFill/>
-                </a:ln>
+              <a:rPr lang="zh-CN" altLang="en-US" sz="5400" b="1" dirty="0">
                 <a:solidFill>
                   <a:srgbClr val="FF0000"/>
                 </a:solidFill>
-                <a:effectLst/>
-                <a:uLnTx/>
-                <a:uFillTx/>
                 <a:latin typeface="微软雅黑"/>
                 <a:ea typeface="微软雅黑"/>
               </a:rPr>
               <a:t>第</a:t>
             </a:r>
             <a:r>
-              <a:rPr lang="en-US" altLang="zh-CN" sz="4800" b="1" dirty="0">
+              <a:rPr lang="en-US" altLang="zh-CN" sz="5400" b="1" dirty="0">
                 <a:solidFill>
                   <a:srgbClr val="FF0000"/>
                 </a:solidFill>
@@ -16231,73 +16285,39 @@
               <a:t>1</a:t>
             </a:r>
             <a:r>
-              <a:rPr kumimoji="0" lang="zh-CN" altLang="en-US" sz="4800" b="1" i="0" u="none" strike="noStrike" kern="1200" cap="none" spc="0" normalizeH="0" baseline="0" noProof="0" dirty="0">
-                <a:ln>
-                  <a:noFill/>
-                </a:ln>
-                <a:solidFill>
-                  <a:srgbClr val="FF0000"/>
-                </a:solidFill>
-                <a:effectLst/>
-                <a:uLnTx/>
-                <a:uFillTx/>
-                <a:latin typeface="微软雅黑"/>
-                <a:ea typeface="微软雅黑"/>
-              </a:rPr>
-              <a:t>节：</a:t>
-            </a:r>
-            <a:r>
-              <a:rPr kumimoji="0" lang="zh-CN" altLang="en-CN" sz="4800" b="1" i="0" u="none" strike="noStrike" kern="1200" cap="none" spc="0" normalizeH="0" baseline="0" noProof="0" dirty="0">
-                <a:ln>
-                  <a:noFill/>
-                </a:ln>
-                <a:solidFill>
-                  <a:srgbClr val="FF0000"/>
-                </a:solidFill>
-                <a:effectLst/>
-                <a:uLnTx/>
-                <a:uFillTx/>
-                <a:latin typeface="微软雅黑"/>
-                <a:ea typeface="微软雅黑"/>
-              </a:rPr>
-              <a:t>矢量</a:t>
-            </a:r>
-            <a:r>
-              <a:rPr kumimoji="0" lang="zh-CN" altLang="en-US" sz="4800" b="1" i="0" u="none" strike="noStrike" kern="1200" cap="none" spc="0" normalizeH="0" baseline="0" noProof="0" dirty="0">
-                <a:ln>
-                  <a:noFill/>
-                </a:ln>
-                <a:solidFill>
-                  <a:srgbClr val="FF0000"/>
-                </a:solidFill>
-                <a:effectLst/>
-                <a:uLnTx/>
-                <a:uFillTx/>
-                <a:latin typeface="微软雅黑"/>
-                <a:ea typeface="微软雅黑"/>
-              </a:rPr>
-              <a:t>数据读写</a:t>
-            </a:r>
-            <a:r>
-              <a:rPr lang="zh-CN" altLang="en-US" sz="4800" b="1" dirty="0">
+              <a:rPr lang="zh-CN" altLang="en-US" sz="5400" b="1" dirty="0">
                 <a:solidFill>
                   <a:srgbClr val="FF0000"/>
                 </a:solidFill>
                 <a:latin typeface="微软雅黑"/>
                 <a:ea typeface="微软雅黑"/>
               </a:rPr>
-              <a:t>及可视化</a:t>
-            </a:r>
-            <a:endParaRPr kumimoji="0" lang="zh-CN" altLang="zh-CN" sz="4800" b="1" i="0" u="none" strike="noStrike" kern="1200" cap="none" spc="0" normalizeH="0" baseline="0" noProof="0" dirty="0">
-              <a:ln>
-                <a:noFill/>
-              </a:ln>
+              <a:t>节：</a:t>
+            </a:r>
+            <a:r>
+              <a:rPr lang="zh-CN" altLang="en-CN" sz="5400" b="1" dirty="0">
+                <a:solidFill>
+                  <a:srgbClr val="FF0000"/>
+                </a:solidFill>
+                <a:latin typeface="微软雅黑"/>
+                <a:ea typeface="微软雅黑"/>
+              </a:rPr>
+              <a:t>矢量</a:t>
+            </a:r>
+            <a:r>
+              <a:rPr lang="zh-CN" altLang="en-US" sz="5400" b="1" dirty="0">
+                <a:solidFill>
+                  <a:srgbClr val="FF0000"/>
+                </a:solidFill>
+                <a:latin typeface="微软雅黑"/>
+                <a:ea typeface="微软雅黑"/>
+              </a:rPr>
+              <a:t>数据读写及可视化</a:t>
+            </a:r>
+            <a:endParaRPr lang="zh-CN" altLang="zh-CN" sz="5400" b="1" dirty="0">
               <a:solidFill>
                 <a:srgbClr val="FF0000"/>
               </a:solidFill>
-              <a:effectLst/>
-              <a:uLnTx/>
-              <a:uFillTx/>
               <a:latin typeface="微软雅黑"/>
               <a:ea typeface="微软雅黑"/>
             </a:endParaRPr>
@@ -16314,7 +16334,7 @@
         </p:nvSpPr>
         <p:spPr bwMode="auto">
           <a:xfrm>
-            <a:off x="153909" y="3931738"/>
+            <a:off x="1677909" y="3931738"/>
             <a:ext cx="8809022" cy="1439862"/>
           </a:xfrm>
           <a:prstGeom prst="rect">
@@ -16348,140 +16368,89 @@
           <a:bodyPr/>
           <a:lstStyle/>
           <a:p>
-            <a:pPr marL="0" marR="0" lvl="0" indent="0" algn="ctr" defTabSz="914400" rtl="0" eaLnBrk="1" fontAlgn="base" latinLnBrk="0" hangingPunct="1">
+            <a:pPr>
               <a:lnSpc>
                 <a:spcPct val="150000"/>
               </a:lnSpc>
               <a:spcBef>
                 <a:spcPts val="0"/>
               </a:spcBef>
-              <a:spcAft>
-                <a:spcPct val="0"/>
-              </a:spcAft>
-              <a:buClrTx/>
               <a:buSzPct val="80000"/>
-              <a:buFontTx/>
-              <a:buNone/>
-              <a:tabLst/>
               <a:defRPr/>
             </a:pPr>
             <a:r>
-              <a:rPr kumimoji="0" lang="zh-CN" altLang="en-US" sz="2400" b="1" i="0" u="none" strike="noStrike" kern="1200" cap="none" spc="0" normalizeH="0" baseline="0" noProof="0">
-                <a:ln>
-                  <a:noFill/>
-                </a:ln>
+              <a:rPr lang="zh-CN" altLang="en-US" b="1">
                 <a:solidFill>
                   <a:srgbClr val="002060"/>
                 </a:solidFill>
-                <a:effectLst/>
-                <a:uLnTx/>
-                <a:uFillTx/>
                 <a:latin typeface="微软雅黑"/>
                 <a:ea typeface="微软雅黑"/>
                 <a:cs typeface="微软雅黑" charset="0"/>
               </a:rPr>
               <a:t>罗 新</a:t>
             </a:r>
-            <a:endParaRPr kumimoji="0" lang="en-US" altLang="zh-CN" sz="2400" b="1" i="0" u="none" strike="noStrike" kern="1200" cap="none" spc="0" normalizeH="0" baseline="0" noProof="0">
-              <a:ln>
-                <a:noFill/>
-              </a:ln>
+            <a:endParaRPr lang="en-US" altLang="zh-CN" b="1">
               <a:solidFill>
                 <a:srgbClr val="002060"/>
               </a:solidFill>
-              <a:effectLst/>
-              <a:uLnTx/>
-              <a:uFillTx/>
               <a:latin typeface="微软雅黑"/>
               <a:ea typeface="微软雅黑"/>
               <a:cs typeface="微软雅黑" charset="0"/>
             </a:endParaRPr>
           </a:p>
           <a:p>
-            <a:pPr marL="0" marR="0" lvl="0" indent="0" algn="ctr" defTabSz="914400" rtl="0" eaLnBrk="1" fontAlgn="base" latinLnBrk="0" hangingPunct="1">
+            <a:pPr>
               <a:lnSpc>
                 <a:spcPct val="150000"/>
               </a:lnSpc>
               <a:spcBef>
                 <a:spcPts val="0"/>
               </a:spcBef>
-              <a:spcAft>
-                <a:spcPct val="0"/>
-              </a:spcAft>
-              <a:buClrTx/>
               <a:buSzPct val="80000"/>
-              <a:buFontTx/>
-              <a:buNone/>
-              <a:tabLst/>
               <a:defRPr/>
             </a:pPr>
             <a:r>
-              <a:rPr kumimoji="0" lang="zh-CN" altLang="en-US" sz="2400" b="1" i="0" u="none" strike="noStrike" kern="1200" cap="none" spc="0" normalizeH="0" baseline="0" noProof="0">
-                <a:ln>
-                  <a:noFill/>
-                </a:ln>
+              <a:rPr lang="zh-CN" altLang="en-US" b="1">
                 <a:solidFill>
                   <a:srgbClr val="002060"/>
                 </a:solidFill>
-                <a:effectLst/>
-                <a:uLnTx/>
-                <a:uFillTx/>
                 <a:latin typeface="微软雅黑"/>
                 <a:ea typeface="微软雅黑"/>
                 <a:cs typeface="微软雅黑" charset="0"/>
               </a:rPr>
               <a:t>云南大学 地球科学学院</a:t>
             </a:r>
-            <a:endParaRPr kumimoji="0" lang="en-US" altLang="zh-CN" sz="2400" b="1" i="0" u="none" strike="noStrike" kern="1200" cap="none" spc="0" normalizeH="0" baseline="0" noProof="0">
-              <a:ln>
-                <a:noFill/>
-              </a:ln>
+            <a:endParaRPr lang="en-US" altLang="zh-CN" b="1">
               <a:solidFill>
                 <a:srgbClr val="002060"/>
               </a:solidFill>
-              <a:effectLst/>
-              <a:uLnTx/>
-              <a:uFillTx/>
               <a:latin typeface="微软雅黑"/>
               <a:ea typeface="微软雅黑"/>
               <a:cs typeface="微软雅黑" charset="0"/>
             </a:endParaRPr>
           </a:p>
           <a:p>
-            <a:pPr marL="0" marR="0" lvl="0" indent="0" algn="ctr" defTabSz="914400" rtl="0" eaLnBrk="1" fontAlgn="base" latinLnBrk="0" hangingPunct="1">
+            <a:pPr>
               <a:lnSpc>
                 <a:spcPct val="150000"/>
               </a:lnSpc>
               <a:spcBef>
                 <a:spcPts val="0"/>
               </a:spcBef>
-              <a:spcAft>
-                <a:spcPct val="0"/>
-              </a:spcAft>
-              <a:buClrTx/>
               <a:buSzPct val="80000"/>
-              <a:buFontTx/>
-              <a:buNone/>
-              <a:tabLst/>
               <a:defRPr/>
             </a:pPr>
-            <a:endParaRPr kumimoji="0" lang="zh-CN" altLang="en-US" sz="2800" b="1" i="0" u="none" strike="noStrike" kern="1200" cap="none" spc="0" normalizeH="0" baseline="0" noProof="0">
-              <a:ln>
-                <a:noFill/>
-              </a:ln>
+            <a:endParaRPr lang="zh-CN" altLang="en-US" sz="2800" b="1">
               <a:solidFill>
                 <a:srgbClr val="002060"/>
               </a:solidFill>
-              <a:effectLst/>
-              <a:uLnTx/>
-              <a:uFillTx/>
               <a:latin typeface="微软雅黑"/>
               <a:ea typeface="微软雅黑"/>
               <a:cs typeface="微软雅黑" charset="0"/>
             </a:endParaRPr>
           </a:p>
           <a:p>
-            <a:pPr marL="0" marR="0" lvl="0" indent="0" algn="ctr" defTabSz="914400" rtl="0" eaLnBrk="1" fontAlgn="base" latinLnBrk="0" hangingPunct="1">
+            <a:pPr>
               <a:lnSpc>
                 <a:spcPct val="120000"/>
               </a:lnSpc>
@@ -16491,30 +16460,20 @@
               <a:spcAft>
                 <a:spcPts val="0"/>
               </a:spcAft>
-              <a:buClrTx/>
               <a:buSzPct val="80000"/>
-              <a:buFontTx/>
-              <a:buNone/>
-              <a:tabLst/>
               <a:defRPr/>
             </a:pPr>
-            <a:endParaRPr kumimoji="0" lang="en-US" altLang="zh-CN" sz="2000" b="0" i="0" u="none" strike="noStrike" kern="1200" cap="none" spc="0" normalizeH="0" baseline="0" noProof="0">
-              <a:ln>
-                <a:noFill/>
-              </a:ln>
+            <a:endParaRPr lang="en-US" altLang="zh-CN" sz="2000">
               <a:solidFill>
                 <a:srgbClr val="002060"/>
               </a:solidFill>
-              <a:effectLst/>
-              <a:uLnTx/>
-              <a:uFillTx/>
               <a:latin typeface="微软雅黑"/>
               <a:ea typeface="微软雅黑"/>
               <a:cs typeface="微软雅黑" charset="0"/>
             </a:endParaRPr>
           </a:p>
           <a:p>
-            <a:pPr marL="0" marR="0" lvl="0" indent="0" algn="ctr" defTabSz="914400" rtl="0" eaLnBrk="1" fontAlgn="base" latinLnBrk="0" hangingPunct="1">
+            <a:pPr>
               <a:lnSpc>
                 <a:spcPct val="120000"/>
               </a:lnSpc>
@@ -16524,30 +16483,20 @@
               <a:spcAft>
                 <a:spcPts val="0"/>
               </a:spcAft>
-              <a:buClrTx/>
               <a:buSzPct val="80000"/>
-              <a:buFontTx/>
-              <a:buNone/>
-              <a:tabLst/>
               <a:defRPr/>
             </a:pPr>
-            <a:endParaRPr kumimoji="0" lang="en-US" altLang="zh-CN" sz="2000" b="0" i="0" u="none" strike="noStrike" kern="1200" cap="none" spc="0" normalizeH="0" baseline="0" noProof="0">
-              <a:ln>
-                <a:noFill/>
-              </a:ln>
+            <a:endParaRPr lang="en-US" altLang="zh-CN" sz="2000">
               <a:solidFill>
                 <a:srgbClr val="002060"/>
               </a:solidFill>
-              <a:effectLst/>
-              <a:uLnTx/>
-              <a:uFillTx/>
               <a:latin typeface="微软雅黑"/>
               <a:ea typeface="微软雅黑"/>
               <a:cs typeface="微软雅黑" charset="0"/>
             </a:endParaRPr>
           </a:p>
           <a:p>
-            <a:pPr marL="0" marR="0" lvl="0" indent="0" algn="ctr" defTabSz="914400" rtl="0" eaLnBrk="1" fontAlgn="base" latinLnBrk="0" hangingPunct="1">
+            <a:pPr>
               <a:lnSpc>
                 <a:spcPct val="120000"/>
               </a:lnSpc>
@@ -16557,23 +16506,13 @@
               <a:spcAft>
                 <a:spcPts val="0"/>
               </a:spcAft>
-              <a:buClrTx/>
               <a:buSzPct val="80000"/>
-              <a:buFontTx/>
-              <a:buNone/>
-              <a:tabLst/>
               <a:defRPr/>
             </a:pPr>
-            <a:endParaRPr kumimoji="0" lang="en-US" altLang="zh-CN" sz="1800" b="0" i="0" u="none" strike="noStrike" kern="1200" cap="none" spc="0" normalizeH="0" baseline="0" noProof="0">
-              <a:ln>
-                <a:noFill/>
-              </a:ln>
+            <a:endParaRPr lang="en-US" altLang="zh-CN" sz="1800">
               <a:solidFill>
                 <a:srgbClr val="002060"/>
               </a:solidFill>
-              <a:effectLst/>
-              <a:uLnTx/>
-              <a:uFillTx/>
               <a:latin typeface="微软雅黑"/>
               <a:ea typeface="微软雅黑"/>
               <a:cs typeface="微软雅黑" charset="0"/>
@@ -16589,7 +16528,7 @@
         </p:nvSpPr>
         <p:spPr>
           <a:xfrm flipV="1">
-            <a:off x="792000" y="3614404"/>
+            <a:off x="2316000" y="3614405"/>
             <a:ext cx="7560000" cy="45719"/>
           </a:xfrm>
           <a:prstGeom prst="rect">
@@ -16629,33 +16568,13 @@
           </a:bodyPr>
           <a:lstStyle/>
           <a:p>
-            <a:pPr marL="0" marR="0" lvl="0" indent="0" algn="l" defTabSz="914400" rtl="0" eaLnBrk="1" fontAlgn="base" latinLnBrk="0" hangingPunct="1">
-              <a:lnSpc>
-                <a:spcPct val="100000"/>
-              </a:lnSpc>
-              <a:spcBef>
-                <a:spcPct val="50000"/>
-              </a:spcBef>
-              <a:spcAft>
-                <a:spcPct val="0"/>
-              </a:spcAft>
-              <a:buClrTx/>
-              <a:buSzTx/>
-              <a:buFontTx/>
-              <a:buNone/>
-              <a:tabLst/>
+            <a:pPr algn="l">
               <a:defRPr/>
             </a:pPr>
-            <a:endParaRPr kumimoji="0" lang="zh-CN" altLang="en-US" sz="2400" b="1" i="0" u="none" strike="noStrike" kern="1200" cap="none" spc="0" normalizeH="0" baseline="0" noProof="0">
-              <a:ln>
-                <a:noFill/>
-              </a:ln>
+            <a:endParaRPr lang="zh-CN" altLang="en-US" b="1">
               <a:solidFill>
                 <a:srgbClr val="FF0000"/>
               </a:solidFill>
-              <a:effectLst/>
-              <a:uLnTx/>
-              <a:uFillTx/>
               <a:latin typeface="微软雅黑" pitchFamily="34" charset="-122"/>
               <a:ea typeface="微软雅黑" pitchFamily="34" charset="-122"/>
             </a:endParaRPr>
@@ -16676,7 +16595,7 @@
         </p:nvSpPr>
         <p:spPr>
           <a:xfrm>
-            <a:off x="307818" y="5474698"/>
+            <a:off x="1831819" y="5474698"/>
             <a:ext cx="8627953" cy="784830"/>
           </a:xfrm>
           <a:prstGeom prst="rect">
@@ -16689,50 +16608,24 @@
           </a:bodyPr>
           <a:lstStyle/>
           <a:p>
-            <a:pPr marL="0" marR="0" lvl="0" indent="0" algn="ctr" defTabSz="914400" rtl="0" eaLnBrk="1" fontAlgn="base" latinLnBrk="0" hangingPunct="1">
-              <a:lnSpc>
-                <a:spcPct val="100000"/>
-              </a:lnSpc>
-              <a:spcBef>
-                <a:spcPct val="50000"/>
-              </a:spcBef>
-              <a:spcAft>
-                <a:spcPct val="0"/>
-              </a:spcAft>
-              <a:buClrTx/>
-              <a:buSzTx/>
-              <a:buFontTx/>
-              <a:buNone/>
-              <a:tabLst/>
+            <a:pPr>
               <a:defRPr/>
             </a:pPr>
             <a:r>
-              <a:rPr kumimoji="0" lang="en-US" sz="1800" b="0" i="0" u="none" strike="noStrike" kern="1200" cap="none" spc="0" normalizeH="0" baseline="0" noProof="0">
-                <a:ln>
-                  <a:noFill/>
-                </a:ln>
+              <a:rPr lang="en-US" sz="1800">
                 <a:solidFill>
                   <a:prstClr val="black"/>
                 </a:solidFill>
-                <a:effectLst/>
-                <a:uLnTx/>
-                <a:uFillTx/>
                 <a:latin typeface="微软雅黑"/>
                 <a:ea typeface="微软雅黑"/>
               </a:rPr>
               <a:t>邮箱</a:t>
             </a:r>
             <a:r>
-              <a:rPr kumimoji="0" lang="en-CN" sz="1800" b="0" i="0" u="none" strike="noStrike" kern="1200" cap="none" spc="0" normalizeH="0" baseline="0" noProof="0">
-                <a:ln>
-                  <a:noFill/>
-                </a:ln>
+              <a:rPr lang="en-CN" sz="1800">
                 <a:solidFill>
                   <a:prstClr val="black"/>
                 </a:solidFill>
-                <a:effectLst/>
-                <a:uLnTx/>
-                <a:uFillTx/>
                 <a:latin typeface="微软雅黑"/>
                 <a:ea typeface="微软雅黑"/>
               </a:rPr>
@@ -16740,97 +16633,53 @@
             </a:r>
           </a:p>
           <a:p>
-            <a:pPr marL="0" marR="0" lvl="0" indent="0" algn="ctr" defTabSz="914400" rtl="0" eaLnBrk="1" fontAlgn="base" latinLnBrk="0" hangingPunct="1">
-              <a:lnSpc>
-                <a:spcPct val="100000"/>
-              </a:lnSpc>
-              <a:spcBef>
-                <a:spcPct val="50000"/>
-              </a:spcBef>
-              <a:spcAft>
-                <a:spcPct val="0"/>
-              </a:spcAft>
-              <a:buClrTx/>
-              <a:buSzTx/>
-              <a:buFontTx/>
-              <a:buNone/>
-              <a:tabLst/>
+            <a:pPr>
               <a:defRPr/>
             </a:pPr>
             <a:r>
-              <a:rPr kumimoji="0" lang="en-CN" sz="1800" b="0" i="0" u="none" strike="noStrike" kern="1200" cap="none" spc="0" normalizeH="0" baseline="0" noProof="0">
-                <a:ln>
-                  <a:noFill/>
-                </a:ln>
+              <a:rPr lang="en-CN" sz="1800">
                 <a:solidFill>
                   <a:prstClr val="black"/>
                 </a:solidFill>
-                <a:effectLst/>
-                <a:uLnTx/>
-                <a:uFillTx/>
                 <a:latin typeface="微软雅黑"/>
                 <a:ea typeface="微软雅黑"/>
               </a:rPr>
               <a:t>地址</a:t>
             </a:r>
             <a:r>
-              <a:rPr kumimoji="0" lang="zh-CN" altLang="en-US" sz="1800" b="0" i="0" u="none" strike="noStrike" kern="1200" cap="none" spc="0" normalizeH="0" baseline="0" noProof="0">
-                <a:ln>
-                  <a:noFill/>
-                </a:ln>
+              <a:rPr lang="zh-CN" altLang="en-US" sz="1800">
                 <a:solidFill>
                   <a:prstClr val="black"/>
                 </a:solidFill>
-                <a:effectLst/>
-                <a:uLnTx/>
-                <a:uFillTx/>
                 <a:latin typeface="微软雅黑"/>
                 <a:ea typeface="微软雅黑"/>
               </a:rPr>
               <a:t>：地球科学学院</a:t>
             </a:r>
             <a:r>
-              <a:rPr kumimoji="0" lang="en-US" altLang="zh-CN" sz="1800" b="0" i="0" u="none" strike="noStrike" kern="1200" cap="none" spc="0" normalizeH="0" baseline="0" noProof="0">
-                <a:ln>
-                  <a:noFill/>
-                </a:ln>
+              <a:rPr lang="en-US" altLang="zh-CN" sz="1800">
                 <a:solidFill>
                   <a:prstClr val="black"/>
                 </a:solidFill>
-                <a:effectLst/>
-                <a:uLnTx/>
-                <a:uFillTx/>
                 <a:latin typeface="微软雅黑"/>
                 <a:ea typeface="微软雅黑"/>
               </a:rPr>
               <a:t>1327</a:t>
             </a:r>
             <a:r>
-              <a:rPr kumimoji="0" lang="zh-CN" altLang="en-US" sz="1800" b="0" i="0" u="none" strike="noStrike" kern="1200" cap="none" spc="0" normalizeH="0" baseline="0" noProof="0">
-                <a:ln>
-                  <a:noFill/>
-                </a:ln>
+              <a:rPr lang="zh-CN" altLang="en-US" sz="1800">
                 <a:solidFill>
                   <a:prstClr val="black"/>
                 </a:solidFill>
-                <a:effectLst/>
-                <a:uLnTx/>
-                <a:uFillTx/>
                 <a:latin typeface="微软雅黑"/>
                 <a:ea typeface="微软雅黑"/>
               </a:rPr>
               <a:t>办公室</a:t>
             </a:r>
-            <a:endParaRPr kumimoji="0" lang="en-CN" sz="1800" b="0" i="0" u="none" strike="noStrike" kern="1200" cap="none" spc="0" normalizeH="0" baseline="0" noProof="0">
-              <a:ln>
-                <a:noFill/>
-              </a:ln>
+            <a:endParaRPr lang="en-CN" sz="1800">
               <a:solidFill>
                 <a:prstClr val="black"/>
               </a:solidFill>
-              <a:effectLst/>
-              <a:uLnTx/>
-              <a:uFillTx/>
               <a:latin typeface="微软雅黑"/>
               <a:ea typeface="微软雅黑"/>
             </a:endParaRPr>
@@ -16859,7 +16708,7 @@
         </p:blipFill>
         <p:spPr>
           <a:xfrm>
-            <a:off x="319693" y="243144"/>
+            <a:off x="1843694" y="243145"/>
             <a:ext cx="2866773" cy="1012641"/>
           </a:xfrm>
           <a:prstGeom prst="rect">
@@ -16889,7 +16738,7 @@
         </p:blipFill>
         <p:spPr>
           <a:xfrm>
-            <a:off x="6162261" y="6259528"/>
+            <a:off x="7686262" y="6259528"/>
             <a:ext cx="2996979" cy="622992"/>
           </a:xfrm>
           <a:prstGeom prst="rect">
@@ -16911,7 +16760,7 @@
         </p:nvSpPr>
         <p:spPr>
           <a:xfrm>
-            <a:off x="4873532" y="248642"/>
+            <a:off x="7752662" y="229140"/>
             <a:ext cx="4246675" cy="369332"/>
           </a:xfrm>
           <a:prstGeom prst="rect">
@@ -17060,7 +16909,7 @@
         <p:spPr>
           <a:xfrm>
             <a:off x="0" y="3471863"/>
-            <a:ext cx="9144000" cy="1543050"/>
+            <a:ext cx="12192000" cy="1543050"/>
           </a:xfrm>
           <a:prstGeom prst="rect">
             <a:avLst/>
@@ -17097,8 +16946,8 @@
         </p:nvSpPr>
         <p:spPr>
           <a:xfrm>
-            <a:off x="189064" y="3868892"/>
-            <a:ext cx="8753057" cy="707886"/>
+            <a:off x="254222" y="3868892"/>
+            <a:ext cx="11670743" cy="707886"/>
           </a:xfrm>
           <a:prstGeom prst="rect">
             <a:avLst/>
@@ -17137,7 +16986,7 @@
         <p:spPr>
           <a:xfrm>
             <a:off x="0" y="5014912"/>
-            <a:ext cx="9144000" cy="72000"/>
+            <a:ext cx="12192000" cy="72000"/>
           </a:xfrm>
           <a:prstGeom prst="rect">
             <a:avLst/>
@@ -17211,8 +17060,8 @@
         </p:nvSpPr>
         <p:spPr>
           <a:xfrm>
-            <a:off x="0" y="8526"/>
-            <a:ext cx="9013371" cy="792162"/>
+            <a:off x="1" y="8526"/>
+            <a:ext cx="10537372" cy="792162"/>
           </a:xfrm>
         </p:spPr>
         <p:txBody>
@@ -17243,8 +17092,8 @@
         </p:nvSpPr>
         <p:spPr>
           <a:xfrm>
-            <a:off x="317665" y="846748"/>
-            <a:ext cx="8508670" cy="662489"/>
+            <a:off x="333829" y="846749"/>
+            <a:ext cx="10016506" cy="743986"/>
           </a:xfrm>
           <a:prstGeom prst="rect">
             <a:avLst/>
@@ -17263,7 +17112,7 @@
               </a:lnSpc>
             </a:pPr>
             <a:r>
-              <a:rPr lang="en-US" altLang="zh-CN" sz="2800" b="1" dirty="0">
+              <a:rPr lang="en-US" altLang="zh-CN" sz="3200" b="1" dirty="0">
                 <a:solidFill>
                   <a:srgbClr val="333333"/>
                 </a:solidFill>
@@ -17273,7 +17122,7 @@
               <a:t>1</a:t>
             </a:r>
             <a:r>
-              <a:rPr lang="zh-CN" altLang="en-US" sz="2800" b="1" dirty="0">
+              <a:rPr lang="zh-CN" altLang="en-US" sz="3200" b="1" dirty="0">
                 <a:solidFill>
                   <a:srgbClr val="333333"/>
                 </a:solidFill>
@@ -17283,7 +17132,7 @@
               <a:t>、</a:t>
             </a:r>
             <a:r>
-              <a:rPr lang="en-US" altLang="zh-CN" sz="2800" b="1" dirty="0" err="1">
+              <a:rPr lang="en-US" altLang="zh-CN" sz="3200" b="1" dirty="0" err="1">
                 <a:solidFill>
                   <a:srgbClr val="333333"/>
                 </a:solidFill>
@@ -17293,7 +17142,7 @@
               <a:t>qgis</a:t>
             </a:r>
             <a:r>
-              <a:rPr lang="zh-CN" altLang="en-US" sz="2800" b="1" dirty="0">
+              <a:rPr lang="zh-CN" altLang="en-US" sz="3200" b="1" dirty="0">
                 <a:solidFill>
                   <a:srgbClr val="333333"/>
                 </a:solidFill>
@@ -17302,7 +17151,7 @@
               </a:rPr>
               <a:t>软件属性编辑</a:t>
             </a:r>
-            <a:endParaRPr lang="en-US" altLang="zh-CN" sz="2800" b="1" dirty="0">
+            <a:endParaRPr lang="en-US" altLang="zh-CN" sz="3200" b="1" dirty="0">
               <a:solidFill>
                 <a:srgbClr val="333333"/>
               </a:solidFill>
@@ -17326,8 +17175,8 @@
         </p:nvSpPr>
         <p:spPr>
           <a:xfrm>
-            <a:off x="317664" y="1543372"/>
-            <a:ext cx="8094816" cy="499560"/>
+            <a:off x="399143" y="1543372"/>
+            <a:ext cx="9537337" cy="581057"/>
           </a:xfrm>
           <a:prstGeom prst="rect">
             <a:avLst/>
@@ -17346,7 +17195,7 @@
               </a:lnSpc>
             </a:pPr>
             <a:r>
-              <a:rPr lang="zh-CN" altLang="en-US" sz="2000" dirty="0">
+              <a:rPr lang="zh-CN" altLang="en-US" dirty="0">
                 <a:solidFill>
                   <a:schemeClr val="bg2"/>
                 </a:solidFill>
@@ -17355,7 +17204,7 @@
               </a:rPr>
               <a:t>点击编辑按键进入编辑状态，再次点击退出编辑状态。</a:t>
             </a:r>
-            <a:endParaRPr lang="en-US" altLang="zh-CN" sz="2000" dirty="0">
+            <a:endParaRPr lang="en-US" altLang="zh-CN" dirty="0">
               <a:solidFill>
                 <a:schemeClr val="bg2"/>
               </a:solidFill>
@@ -17379,7 +17228,7 @@
         </p:nvGrpSpPr>
         <p:grpSpPr>
           <a:xfrm>
-            <a:off x="1988138" y="2251921"/>
+            <a:off x="6255339" y="2287358"/>
             <a:ext cx="4632581" cy="4261735"/>
             <a:chOff x="1988138" y="2251921"/>
             <a:chExt cx="4632581" cy="4261735"/>
@@ -17412,6 +17261,13 @@
             <a:prstGeom prst="rect">
               <a:avLst/>
             </a:prstGeom>
+            <a:ln w="28575">
+              <a:solidFill>
+                <a:schemeClr val="accent1">
+                  <a:lumMod val="75000"/>
+                </a:schemeClr>
+              </a:solidFill>
+            </a:ln>
           </p:spPr>
         </p:pic>
         <p:sp>
@@ -17459,6 +17315,44 @@
           </p:txBody>
         </p:sp>
       </p:grpSp>
+      <p:pic>
+        <p:nvPicPr>
+          <p:cNvPr id="8" name="图片 7">
+            <a:extLst>
+              <a:ext uri="{FF2B5EF4-FFF2-40B4-BE49-F238E27FC236}">
+                <a16:creationId xmlns:a16="http://schemas.microsoft.com/office/drawing/2014/main" id="{E888F7BC-489D-1339-9FED-3647C362BE85}"/>
+              </a:ext>
+            </a:extLst>
+          </p:cNvPr>
+          <p:cNvPicPr>
+            <a:picLocks noChangeAspect="1"/>
+          </p:cNvPicPr>
+          <p:nvPr/>
+        </p:nvPicPr>
+        <p:blipFill>
+          <a:blip r:embed="rId4"/>
+          <a:srcRect t="19895" b="10793"/>
+          <a:stretch>
+            <a:fillRect/>
+          </a:stretch>
+        </p:blipFill>
+        <p:spPr>
+          <a:xfrm>
+            <a:off x="1304080" y="2287357"/>
+            <a:ext cx="4654288" cy="4261735"/>
+          </a:xfrm>
+          <a:prstGeom prst="rect">
+            <a:avLst/>
+          </a:prstGeom>
+          <a:ln w="28575">
+            <a:solidFill>
+              <a:schemeClr val="accent1">
+                <a:lumMod val="75000"/>
+              </a:schemeClr>
+            </a:solidFill>
+          </a:ln>
+        </p:spPr>
+      </p:pic>
     </p:spTree>
     <p:extLst>
       <p:ext uri="{BB962C8B-B14F-4D97-AF65-F5344CB8AC3E}">
@@ -17504,8 +17398,8 @@
         </p:nvSpPr>
         <p:spPr>
           <a:xfrm>
-            <a:off x="0" y="8526"/>
-            <a:ext cx="9013371" cy="792162"/>
+            <a:off x="1" y="8526"/>
+            <a:ext cx="10537372" cy="792162"/>
           </a:xfrm>
         </p:spPr>
         <p:txBody>
@@ -17536,8 +17430,8 @@
         </p:nvSpPr>
         <p:spPr>
           <a:xfrm>
-            <a:off x="317665" y="846748"/>
-            <a:ext cx="8508670" cy="662489"/>
+            <a:off x="152400" y="846749"/>
+            <a:ext cx="10197935" cy="743986"/>
           </a:xfrm>
           <a:prstGeom prst="rect">
             <a:avLst/>
@@ -17556,7 +17450,7 @@
               </a:lnSpc>
             </a:pPr>
             <a:r>
-              <a:rPr lang="en-US" altLang="zh-CN" sz="2800" b="1" dirty="0">
+              <a:rPr lang="en-US" altLang="zh-CN" sz="3200" b="1" dirty="0">
                 <a:solidFill>
                   <a:srgbClr val="333333"/>
                 </a:solidFill>
@@ -17566,7 +17460,7 @@
               <a:t>1</a:t>
             </a:r>
             <a:r>
-              <a:rPr lang="zh-CN" altLang="en-US" sz="2800" b="1" dirty="0">
+              <a:rPr lang="zh-CN" altLang="en-US" sz="3200" b="1" dirty="0">
                 <a:solidFill>
                   <a:srgbClr val="333333"/>
                 </a:solidFill>
@@ -17576,7 +17470,7 @@
               <a:t>、</a:t>
             </a:r>
             <a:r>
-              <a:rPr lang="en-US" altLang="zh-CN" sz="2800" b="1" dirty="0" err="1">
+              <a:rPr lang="en-US" altLang="zh-CN" sz="3200" b="1" dirty="0" err="1">
                 <a:solidFill>
                   <a:srgbClr val="333333"/>
                 </a:solidFill>
@@ -17586,7 +17480,7 @@
               <a:t>qgis</a:t>
             </a:r>
             <a:r>
-              <a:rPr lang="zh-CN" altLang="en-US" sz="2800" b="1" dirty="0">
+              <a:rPr lang="zh-CN" altLang="en-US" sz="3200" b="1" dirty="0">
                 <a:solidFill>
                   <a:srgbClr val="333333"/>
                 </a:solidFill>
@@ -17595,7 +17489,7 @@
               </a:rPr>
               <a:t>软件添加字段</a:t>
             </a:r>
-            <a:endParaRPr lang="en-US" altLang="zh-CN" sz="2800" b="1" dirty="0">
+            <a:endParaRPr lang="en-US" altLang="zh-CN" sz="3200" b="1" dirty="0">
               <a:solidFill>
                 <a:srgbClr val="333333"/>
               </a:solidFill>
@@ -17619,8 +17513,8 @@
         </p:nvSpPr>
         <p:spPr>
           <a:xfrm>
-            <a:off x="317664" y="1543372"/>
-            <a:ext cx="8094816" cy="499560"/>
+            <a:off x="152400" y="1543372"/>
+            <a:ext cx="9784080" cy="581057"/>
           </a:xfrm>
           <a:prstGeom prst="rect">
             <a:avLst/>
@@ -17639,7 +17533,7 @@
               </a:lnSpc>
             </a:pPr>
             <a:r>
-              <a:rPr lang="zh-CN" altLang="en-US" sz="2000" dirty="0">
+              <a:rPr lang="zh-CN" altLang="en-US" dirty="0">
                 <a:solidFill>
                   <a:schemeClr val="bg2"/>
                 </a:solidFill>
@@ -17649,7 +17543,7 @@
               <a:t>点击“</a:t>
             </a:r>
             <a:r>
-              <a:rPr lang="en-US" altLang="zh-CN" sz="2000" dirty="0">
+              <a:rPr lang="en-US" altLang="zh-CN" dirty="0">
                 <a:solidFill>
                   <a:schemeClr val="bg2"/>
                 </a:solidFill>
@@ -17659,7 +17553,7 @@
               <a:t>open field calculator</a:t>
             </a:r>
             <a:r>
-              <a:rPr lang="zh-CN" altLang="en-US" sz="2000" dirty="0">
+              <a:rPr lang="zh-CN" altLang="en-US" dirty="0">
                 <a:solidFill>
                   <a:schemeClr val="bg2"/>
                 </a:solidFill>
@@ -17668,7 +17562,7 @@
               </a:rPr>
               <a:t>”</a:t>
             </a:r>
-            <a:endParaRPr lang="en-US" altLang="zh-CN" sz="2000" dirty="0">
+            <a:endParaRPr lang="en-US" altLang="zh-CN" dirty="0">
               <a:solidFill>
                 <a:schemeClr val="bg2"/>
               </a:solidFill>
@@ -17692,8 +17586,8 @@
         </p:nvGrpSpPr>
         <p:grpSpPr>
           <a:xfrm>
-            <a:off x="253866" y="2451938"/>
-            <a:ext cx="4336746" cy="3346978"/>
+            <a:off x="1349694" y="2375086"/>
+            <a:ext cx="4717589" cy="3511558"/>
             <a:chOff x="317664" y="2451938"/>
             <a:chExt cx="4336746" cy="3346978"/>
           </a:xfrm>
@@ -17726,6 +17620,13 @@
             <a:prstGeom prst="rect">
               <a:avLst/>
             </a:prstGeom>
+            <a:ln w="28575">
+              <a:solidFill>
+                <a:schemeClr val="accent1">
+                  <a:lumMod val="75000"/>
+                </a:schemeClr>
+              </a:solidFill>
+            </a:ln>
           </p:spPr>
         </p:pic>
         <p:sp>
@@ -17795,12 +17696,19 @@
         </p:blipFill>
         <p:spPr>
           <a:xfrm>
-            <a:off x="4713181" y="2451938"/>
-            <a:ext cx="4113154" cy="3346978"/>
+            <a:off x="6295238" y="2384246"/>
+            <a:ext cx="4304152" cy="3502398"/>
           </a:xfrm>
           <a:prstGeom prst="rect">
             <a:avLst/>
           </a:prstGeom>
+          <a:ln w="28575">
+            <a:solidFill>
+              <a:schemeClr val="accent1">
+                <a:lumMod val="75000"/>
+              </a:schemeClr>
+            </a:solidFill>
+          </a:ln>
         </p:spPr>
       </p:pic>
       <p:sp>
@@ -17817,8 +17725,8 @@
         </p:nvSpPr>
         <p:spPr>
           <a:xfrm>
-            <a:off x="524592" y="6011252"/>
-            <a:ext cx="8094816" cy="499560"/>
+            <a:off x="2048592" y="6011252"/>
+            <a:ext cx="8094816" cy="581057"/>
           </a:xfrm>
           <a:prstGeom prst="rect">
             <a:avLst/>
@@ -17831,13 +17739,13 @@
           </a:bodyPr>
           <a:lstStyle/>
           <a:p>
-            <a:pPr algn="l">
+            <a:pPr>
               <a:lnSpc>
                 <a:spcPct val="150000"/>
               </a:lnSpc>
             </a:pPr>
             <a:r>
-              <a:rPr lang="zh-CN" altLang="en-US" sz="2000" dirty="0">
+              <a:rPr lang="zh-CN" altLang="en-US" dirty="0">
                 <a:solidFill>
                   <a:schemeClr val="bg2"/>
                 </a:solidFill>
@@ -17846,7 +17754,7 @@
               </a:rPr>
               <a:t>计算面积长度时一般应确保矢量数据为投影坐标系。</a:t>
             </a:r>
-            <a:endParaRPr lang="en-US" altLang="zh-CN" sz="2000" dirty="0">
+            <a:endParaRPr lang="en-US" altLang="zh-CN" dirty="0">
               <a:solidFill>
                 <a:schemeClr val="bg2"/>
               </a:solidFill>
@@ -17913,8 +17821,8 @@
         </p:nvSpPr>
         <p:spPr>
           <a:xfrm>
-            <a:off x="0" y="8526"/>
-            <a:ext cx="9013371" cy="792162"/>
+            <a:off x="1" y="8526"/>
+            <a:ext cx="10537372" cy="792162"/>
           </a:xfrm>
         </p:spPr>
         <p:txBody>
@@ -17945,8 +17853,8 @@
         </p:nvSpPr>
         <p:spPr>
           <a:xfrm>
-            <a:off x="317665" y="846748"/>
-            <a:ext cx="8508670" cy="662489"/>
+            <a:off x="573314" y="846749"/>
+            <a:ext cx="9777021" cy="743986"/>
           </a:xfrm>
           <a:prstGeom prst="rect">
             <a:avLst/>
@@ -17965,7 +17873,7 @@
               </a:lnSpc>
             </a:pPr>
             <a:r>
-              <a:rPr lang="en-US" altLang="zh-CN" sz="2800" b="1" dirty="0">
+              <a:rPr lang="en-US" altLang="zh-CN" sz="3200" b="1" dirty="0">
                 <a:solidFill>
                   <a:srgbClr val="333333"/>
                 </a:solidFill>
@@ -17975,7 +17883,7 @@
               <a:t>1</a:t>
             </a:r>
             <a:r>
-              <a:rPr lang="zh-CN" altLang="en-US" sz="2800" b="1" dirty="0">
+              <a:rPr lang="zh-CN" altLang="en-US" sz="3200" b="1" dirty="0">
                 <a:solidFill>
                   <a:srgbClr val="333333"/>
                 </a:solidFill>
@@ -17985,7 +17893,7 @@
               <a:t>、</a:t>
             </a:r>
             <a:r>
-              <a:rPr lang="en-US" altLang="zh-CN" sz="2800" b="1" dirty="0" err="1">
+              <a:rPr lang="en-US" altLang="zh-CN" sz="3200" b="1" dirty="0" err="1">
                 <a:solidFill>
                   <a:srgbClr val="333333"/>
                 </a:solidFill>
@@ -17995,7 +17903,7 @@
               <a:t>Geopandas</a:t>
             </a:r>
             <a:r>
-              <a:rPr lang="zh-CN" altLang="en-US" sz="2800" b="1" dirty="0">
+              <a:rPr lang="zh-CN" altLang="en-US" sz="3200" b="1" dirty="0">
                 <a:solidFill>
                   <a:srgbClr val="333333"/>
                 </a:solidFill>
@@ -18004,7 +17912,7 @@
               </a:rPr>
               <a:t>开源库</a:t>
             </a:r>
-            <a:endParaRPr lang="en-US" altLang="zh-CN" sz="2800" b="1" dirty="0">
+            <a:endParaRPr lang="en-US" altLang="zh-CN" sz="3200" b="1" dirty="0">
               <a:solidFill>
                 <a:srgbClr val="333333"/>
               </a:solidFill>
@@ -18028,8 +17936,8 @@
         </p:nvSpPr>
         <p:spPr>
           <a:xfrm>
-            <a:off x="317664" y="1619572"/>
-            <a:ext cx="8094816" cy="5013039"/>
+            <a:off x="573314" y="1728431"/>
+            <a:ext cx="9363166" cy="5013039"/>
           </a:xfrm>
           <a:prstGeom prst="rect">
             <a:avLst/>
@@ -18408,8 +18316,8 @@
         </p:nvSpPr>
         <p:spPr>
           <a:xfrm>
-            <a:off x="0" y="8526"/>
-            <a:ext cx="9013371" cy="792162"/>
+            <a:off x="1" y="8526"/>
+            <a:ext cx="10537372" cy="792162"/>
           </a:xfrm>
         </p:spPr>
         <p:txBody>
@@ -18441,8 +18349,8 @@
         </p:nvSpPr>
         <p:spPr>
           <a:xfrm>
-            <a:off x="414554" y="1064872"/>
-            <a:ext cx="8314891" cy="743986"/>
+            <a:off x="224971" y="1064872"/>
+            <a:ext cx="10028475" cy="743986"/>
           </a:xfrm>
           <a:prstGeom prst="rect">
             <a:avLst/>
@@ -18461,7 +18369,7 @@
               </a:lnSpc>
             </a:pPr>
             <a:r>
-              <a:rPr lang="zh-CN" altLang="en-US" sz="3200" b="1">
+              <a:rPr lang="zh-CN" altLang="en-US" sz="3200" b="1" dirty="0">
                 <a:solidFill>
                   <a:srgbClr val="333333"/>
                 </a:solidFill>
@@ -18470,7 +18378,7 @@
               </a:rPr>
               <a:t>课后练习</a:t>
             </a:r>
-            <a:endParaRPr lang="en-US" altLang="zh-CN" sz="3200" b="1">
+            <a:endParaRPr lang="en-US" altLang="zh-CN" sz="3200" b="1" dirty="0">
               <a:solidFill>
                 <a:srgbClr val="333333"/>
               </a:solidFill>
@@ -18494,8 +18402,8 @@
         </p:nvSpPr>
         <p:spPr>
           <a:xfrm>
-            <a:off x="414554" y="1783013"/>
-            <a:ext cx="7967446" cy="2360070"/>
+            <a:off x="486229" y="1783013"/>
+            <a:ext cx="9419771" cy="667299"/>
           </a:xfrm>
           <a:prstGeom prst="rect">
             <a:avLst/>
@@ -18524,34 +18432,6 @@
               </a:rPr>
               <a:t>练习课堂所讲内容。</a:t>
             </a:r>
-            <a:endParaRPr lang="en-US" altLang="zh-CN" sz="2200" dirty="0">
-              <a:solidFill>
-                <a:srgbClr val="333333"/>
-              </a:solidFill>
-              <a:latin typeface="+mn-ea"/>
-              <a:ea typeface="+mn-ea"/>
-            </a:endParaRPr>
-          </a:p>
-          <a:p>
-            <a:pPr algn="just">
-              <a:lnSpc>
-                <a:spcPct val="200000"/>
-              </a:lnSpc>
-            </a:pPr>
-            <a:endParaRPr lang="en-US" altLang="zh-CN" sz="2200" dirty="0">
-              <a:solidFill>
-                <a:srgbClr val="333333"/>
-              </a:solidFill>
-              <a:latin typeface="+mn-ea"/>
-              <a:ea typeface="+mn-ea"/>
-            </a:endParaRPr>
-          </a:p>
-          <a:p>
-            <a:pPr algn="just">
-              <a:lnSpc>
-                <a:spcPct val="200000"/>
-              </a:lnSpc>
-            </a:pPr>
             <a:endParaRPr lang="en-US" altLang="zh-CN" sz="2200" dirty="0">
               <a:solidFill>
                 <a:srgbClr val="333333"/>
@@ -18623,7 +18503,7 @@
           <a:bodyPr wrap="none" anchor="ctr"/>
           <a:lstStyle/>
           <a:p>
-            <a:pPr eaLnBrk="1" fontAlgn="auto" hangingPunct="1">
+            <a:pPr fontAlgn="auto">
               <a:spcBef>
                 <a:spcPts val="0"/>
               </a:spcBef>
@@ -18654,7 +18534,7 @@
         </p:nvGrpSpPr>
         <p:grpSpPr>
           <a:xfrm>
-            <a:off x="2130680" y="3897541"/>
+            <a:off x="1912968" y="3926571"/>
             <a:ext cx="6734646" cy="717997"/>
             <a:chOff x="2121801" y="3511390"/>
             <a:chExt cx="5718901" cy="576000"/>
@@ -18705,7 +18585,7 @@
             <a:bodyPr rtlCol="0" anchor="ctr"/>
             <a:lstStyle/>
             <a:p>
-              <a:pPr algn="ctr" eaLnBrk="1" fontAlgn="auto" hangingPunct="1">
+              <a:pPr fontAlgn="auto">
                 <a:spcBef>
                   <a:spcPts val="0"/>
                 </a:spcBef>
@@ -18714,7 +18594,7 @@
                 </a:spcAft>
               </a:pPr>
               <a:r>
-                <a:rPr lang="zh-CN" altLang="en-US" sz="3200" b="1">
+                <a:rPr lang="zh-CN" altLang="en-US" sz="3600" b="1">
                   <a:solidFill>
                     <a:schemeClr val="accent1"/>
                   </a:solidFill>
@@ -18734,8 +18614,8 @@
           </p:nvSpPr>
           <p:spPr>
             <a:xfrm>
-              <a:off x="2777899" y="3560440"/>
-              <a:ext cx="5062803" cy="469125"/>
+              <a:off x="2777899" y="3535749"/>
+              <a:ext cx="5062803" cy="518507"/>
             </a:xfrm>
             <a:prstGeom prst="rect">
               <a:avLst/>
@@ -18756,7 +18636,7 @@
                 </a:spcAft>
               </a:pPr>
               <a:r>
-                <a:rPr lang="zh-CN" altLang="en-CN" sz="3200" b="1" dirty="0">
+                <a:rPr lang="zh-CN" altLang="en-CN" sz="3600" b="1" dirty="0">
                   <a:solidFill>
                     <a:schemeClr val="accent1"/>
                   </a:solidFill>
@@ -18769,7 +18649,7 @@
                 <a:t>矢量</a:t>
               </a:r>
               <a:r>
-                <a:rPr lang="zh-CN" altLang="en-US" sz="3200" b="1" dirty="0">
+                <a:rPr lang="zh-CN" altLang="en-US" sz="3600" b="1" dirty="0">
                   <a:solidFill>
                     <a:schemeClr val="accent1"/>
                   </a:solidFill>
@@ -18781,7 +18661,7 @@
                 </a:rPr>
                 <a:t>数据编辑及可视化</a:t>
               </a:r>
-              <a:endParaRPr lang="en-US" altLang="zh-CN" sz="3200" b="1" dirty="0">
+              <a:endParaRPr lang="en-US" altLang="zh-CN" sz="3600" b="1" dirty="0">
                 <a:solidFill>
                   <a:schemeClr val="accent1"/>
                 </a:solidFill>
@@ -18803,7 +18683,7 @@
         </p:nvSpPr>
         <p:spPr>
           <a:xfrm>
-            <a:off x="7172373" y="260648"/>
+            <a:off x="8696373" y="260648"/>
             <a:ext cx="1608134" cy="923330"/>
           </a:xfrm>
           <a:prstGeom prst="rect">
@@ -18817,7 +18697,7 @@
           </a:bodyPr>
           <a:lstStyle/>
           <a:p>
-            <a:pPr algn="r" eaLnBrk="1" fontAlgn="auto" hangingPunct="1">
+            <a:pPr algn="r" fontAlgn="auto">
               <a:spcBef>
                 <a:spcPts val="0"/>
               </a:spcBef>
@@ -18859,7 +18739,7 @@
         </p:nvGrpSpPr>
         <p:grpSpPr>
           <a:xfrm>
-            <a:off x="2130680" y="2456690"/>
+            <a:off x="1912969" y="2485719"/>
             <a:ext cx="6649827" cy="772176"/>
             <a:chOff x="2121802" y="2115450"/>
             <a:chExt cx="5221533" cy="576000"/>
@@ -18916,7 +18796,7 @@
             <a:bodyPr rtlCol="0" anchor="ctr"/>
             <a:lstStyle/>
             <a:p>
-              <a:pPr algn="ctr" eaLnBrk="1" fontAlgn="auto" hangingPunct="1">
+              <a:pPr fontAlgn="auto">
                 <a:spcBef>
                   <a:spcPts val="0"/>
                 </a:spcBef>
@@ -18925,7 +18805,7 @@
                 </a:spcAft>
               </a:pPr>
               <a:r>
-                <a:rPr lang="zh-CN" altLang="en-US" sz="3200" b="1">
+                <a:rPr lang="zh-CN" altLang="en-US" sz="3600" b="1">
                   <a:solidFill>
                     <a:schemeClr val="accent1"/>
                   </a:solidFill>
@@ -18951,8 +18831,8 @@
           </p:nvSpPr>
           <p:spPr>
             <a:xfrm>
-              <a:off x="2697802" y="2173516"/>
-              <a:ext cx="4645533" cy="436209"/>
+              <a:off x="2697802" y="2150557"/>
+              <a:ext cx="4645533" cy="482127"/>
             </a:xfrm>
             <a:prstGeom prst="rect">
               <a:avLst/>
@@ -18964,7 +18844,7 @@
             </a:bodyPr>
             <a:lstStyle/>
             <a:p>
-              <a:pPr algn="l" eaLnBrk="1" fontAlgn="auto" hangingPunct="1">
+              <a:pPr algn="l" fontAlgn="auto">
                 <a:spcBef>
                   <a:spcPts val="0"/>
                 </a:spcBef>
@@ -18973,7 +18853,7 @@
                 </a:spcAft>
               </a:pPr>
               <a:r>
-                <a:rPr lang="zh-CN" altLang="en-CN" sz="3200" b="1" dirty="0">
+                <a:rPr lang="zh-CN" altLang="en-CN" sz="3600" b="1" dirty="0">
                   <a:solidFill>
                     <a:schemeClr val="accent1"/>
                   </a:solidFill>
@@ -18986,7 +18866,7 @@
                 <a:t>矢量</a:t>
               </a:r>
               <a:r>
-                <a:rPr lang="zh-CN" altLang="en-US" sz="3200" b="1" dirty="0">
+                <a:rPr lang="zh-CN" altLang="en-US" sz="3600" b="1" dirty="0">
                   <a:solidFill>
                     <a:schemeClr val="accent1"/>
                   </a:solidFill>
@@ -19044,7 +18924,7 @@
         <p:spPr>
           <a:xfrm>
             <a:off x="0" y="3471863"/>
-            <a:ext cx="9144000" cy="1543050"/>
+            <a:ext cx="12192000" cy="1543050"/>
           </a:xfrm>
           <a:prstGeom prst="rect">
             <a:avLst/>
@@ -19063,7 +18943,7 @@
           <a:lstStyle/>
           <a:p>
             <a:pPr algn="l"/>
-            <a:endParaRPr lang="zh-CN" altLang="en-US" b="1" dirty="0">
+            <a:endParaRPr lang="zh-CN" altLang="en-US" sz="2800" b="1" dirty="0">
               <a:solidFill>
                 <a:srgbClr val="FF0000"/>
               </a:solidFill>
@@ -19081,8 +18961,8 @@
         </p:nvSpPr>
         <p:spPr>
           <a:xfrm>
-            <a:off x="189064" y="3868892"/>
-            <a:ext cx="8753057" cy="707886"/>
+            <a:off x="254222" y="3868892"/>
+            <a:ext cx="11670743" cy="769441"/>
           </a:xfrm>
           <a:prstGeom prst="rect">
             <a:avLst/>
@@ -19103,7 +18983,7 @@
               </a:spcAft>
             </a:pPr>
             <a:r>
-              <a:rPr lang="zh-CN" altLang="en-US" sz="4000" b="1" dirty="0">
+              <a:rPr lang="zh-CN" altLang="en-US" sz="4400" b="1" dirty="0">
                 <a:latin typeface="微软雅黑" pitchFamily="34" charset="-122"/>
                 <a:ea typeface="微软雅黑" pitchFamily="34" charset="-122"/>
               </a:rPr>
@@ -19121,7 +19001,7 @@
         <p:spPr>
           <a:xfrm>
             <a:off x="0" y="5014912"/>
-            <a:ext cx="9144000" cy="72000"/>
+            <a:ext cx="12192000" cy="72000"/>
           </a:xfrm>
           <a:prstGeom prst="rect">
             <a:avLst/>
@@ -19140,7 +19020,7 @@
           <a:lstStyle/>
           <a:p>
             <a:pPr algn="l"/>
-            <a:endParaRPr lang="zh-CN" altLang="en-US" b="1">
+            <a:endParaRPr lang="zh-CN" altLang="en-US" sz="2800" b="1">
               <a:solidFill>
                 <a:srgbClr val="FF0000"/>
               </a:solidFill>
@@ -19195,8 +19075,8 @@
         </p:nvSpPr>
         <p:spPr>
           <a:xfrm>
-            <a:off x="0" y="8526"/>
-            <a:ext cx="9013371" cy="792162"/>
+            <a:off x="1" y="8526"/>
+            <a:ext cx="10537372" cy="792162"/>
           </a:xfrm>
         </p:spPr>
         <p:txBody>
@@ -19227,8 +19107,8 @@
         </p:nvSpPr>
         <p:spPr>
           <a:xfrm>
-            <a:off x="239287" y="1138859"/>
-            <a:ext cx="8094816" cy="1169551"/>
+            <a:off x="355600" y="1138860"/>
+            <a:ext cx="9502503" cy="1323439"/>
           </a:xfrm>
           <a:prstGeom prst="rect">
             <a:avLst/>
@@ -19243,7 +19123,7 @@
           <a:p>
             <a:pPr algn="just"/>
             <a:r>
-              <a:rPr lang="en-US" altLang="zh-CN" sz="2800" b="1" dirty="0">
+              <a:rPr lang="en-US" altLang="zh-CN" sz="3200" b="1" dirty="0">
                 <a:solidFill>
                   <a:srgbClr val="333333"/>
                 </a:solidFill>
@@ -19253,7 +19133,7 @@
               <a:t>QGIS</a:t>
             </a:r>
             <a:r>
-              <a:rPr lang="zh-CN" altLang="en-US" sz="2800" b="1" dirty="0">
+              <a:rPr lang="zh-CN" altLang="en-US" sz="3200" b="1" dirty="0">
                 <a:solidFill>
                   <a:srgbClr val="333333"/>
                 </a:solidFill>
@@ -19263,7 +19143,7 @@
               <a:t>软件</a:t>
             </a:r>
             <a:r>
-              <a:rPr lang="en-US" altLang="zh-CN" sz="2800" b="1" dirty="0">
+              <a:rPr lang="en-US" altLang="zh-CN" sz="3200" b="1" dirty="0">
                 <a:solidFill>
                   <a:srgbClr val="333333"/>
                 </a:solidFill>
@@ -19273,7 +19153,7 @@
               <a:t>-</a:t>
             </a:r>
             <a:r>
-              <a:rPr lang="zh-CN" altLang="en-US" sz="2800" b="1" dirty="0">
+              <a:rPr lang="zh-CN" altLang="en-US" sz="3200" b="1" dirty="0">
                 <a:solidFill>
                   <a:srgbClr val="333333"/>
                 </a:solidFill>
@@ -19282,7 +19162,7 @@
               </a:rPr>
               <a:t>查看信息</a:t>
             </a:r>
-            <a:endParaRPr lang="en-US" altLang="zh-CN" sz="2800" b="1" dirty="0">
+            <a:endParaRPr lang="en-US" altLang="zh-CN" sz="3200" b="1" dirty="0">
               <a:solidFill>
                 <a:srgbClr val="333333"/>
               </a:solidFill>
@@ -19293,7 +19173,7 @@
           <a:p>
             <a:pPr algn="just"/>
             <a:r>
-              <a:rPr lang="zh-CN" altLang="en-US" sz="2800" b="1" dirty="0">
+              <a:rPr lang="zh-CN" altLang="en-US" sz="3200" b="1" dirty="0">
                 <a:solidFill>
                   <a:srgbClr val="333333"/>
                 </a:solidFill>
@@ -19303,7 +19183,7 @@
               <a:t>点击</a:t>
             </a:r>
             <a:r>
-              <a:rPr lang="en-US" altLang="zh-CN" sz="2800" b="1" dirty="0">
+              <a:rPr lang="en-US" altLang="zh-CN" sz="3200" b="1" dirty="0">
                 <a:solidFill>
                   <a:srgbClr val="333333"/>
                 </a:solidFill>
@@ -19313,7 +19193,7 @@
               <a:t>properties/open attribute table</a:t>
             </a:r>
             <a:r>
-              <a:rPr lang="zh-CN" altLang="en-US" sz="2800" b="1" dirty="0">
+              <a:rPr lang="zh-CN" altLang="en-US" sz="3200" b="1" dirty="0">
                 <a:solidFill>
                   <a:srgbClr val="333333"/>
                 </a:solidFill>
@@ -19322,7 +19202,7 @@
               </a:rPr>
               <a:t>）</a:t>
             </a:r>
-            <a:endParaRPr lang="en-US" altLang="zh-CN" sz="2800" b="1" dirty="0">
+            <a:endParaRPr lang="en-US" altLang="zh-CN" sz="3200" b="1" dirty="0">
               <a:solidFill>
                 <a:srgbClr val="333333"/>
               </a:solidFill>
@@ -19354,8 +19234,8 @@
         </p:blipFill>
         <p:spPr>
           <a:xfrm>
-            <a:off x="4948163" y="2512391"/>
-            <a:ext cx="3866964" cy="3206750"/>
+            <a:off x="7635609" y="2653837"/>
+            <a:ext cx="4246934" cy="3521847"/>
           </a:xfrm>
           <a:prstGeom prst="rect">
             <a:avLst/>
@@ -19389,8 +19269,8 @@
         </p:blipFill>
         <p:spPr>
           <a:xfrm>
-            <a:off x="3419716" y="3429000"/>
-            <a:ext cx="3461929" cy="3206750"/>
+            <a:off x="3608140" y="2653838"/>
+            <a:ext cx="3802100" cy="3521847"/>
           </a:xfrm>
           <a:prstGeom prst="rect">
             <a:avLst/>
@@ -19416,7 +19296,7 @@
         </p:nvGrpSpPr>
         <p:grpSpPr>
           <a:xfrm>
-            <a:off x="328873" y="2646581"/>
+            <a:off x="525299" y="2653838"/>
             <a:ext cx="2822100" cy="3728194"/>
             <a:chOff x="328873" y="2646581"/>
             <a:chExt cx="2822100" cy="3728194"/>
@@ -19590,8 +19470,8 @@
         </p:nvSpPr>
         <p:spPr>
           <a:xfrm>
-            <a:off x="0" y="8526"/>
-            <a:ext cx="9013371" cy="792162"/>
+            <a:off x="1" y="8526"/>
+            <a:ext cx="10537372" cy="792162"/>
           </a:xfrm>
         </p:spPr>
         <p:txBody>
@@ -19622,8 +19502,8 @@
         </p:nvSpPr>
         <p:spPr>
           <a:xfrm>
-            <a:off x="239287" y="1046261"/>
-            <a:ext cx="8094816" cy="1169551"/>
+            <a:off x="195943" y="1046262"/>
+            <a:ext cx="9662160" cy="1323439"/>
           </a:xfrm>
           <a:prstGeom prst="rect">
             <a:avLst/>
@@ -19638,7 +19518,7 @@
           <a:p>
             <a:pPr algn="just"/>
             <a:r>
-              <a:rPr lang="en-US" altLang="zh-CN" sz="2800" b="1" dirty="0">
+              <a:rPr lang="en-US" altLang="zh-CN" sz="3200" b="1" dirty="0">
                 <a:solidFill>
                   <a:srgbClr val="333333"/>
                 </a:solidFill>
@@ -19648,7 +19528,7 @@
               <a:t>QGIS</a:t>
             </a:r>
             <a:r>
-              <a:rPr lang="zh-CN" altLang="en-US" sz="2800" b="1" dirty="0">
+              <a:rPr lang="zh-CN" altLang="en-US" sz="3200" b="1" dirty="0">
                 <a:solidFill>
                   <a:srgbClr val="333333"/>
                 </a:solidFill>
@@ -19658,7 +19538,7 @@
               <a:t>软件</a:t>
             </a:r>
             <a:r>
-              <a:rPr lang="en-US" altLang="zh-CN" sz="2800" b="1" dirty="0">
+              <a:rPr lang="en-US" altLang="zh-CN" sz="3200" b="1" dirty="0">
                 <a:solidFill>
                   <a:srgbClr val="333333"/>
                 </a:solidFill>
@@ -19668,7 +19548,7 @@
               <a:t>-</a:t>
             </a:r>
             <a:r>
-              <a:rPr lang="zh-CN" altLang="en-US" sz="2800" b="1" dirty="0">
+              <a:rPr lang="zh-CN" altLang="en-US" sz="3200" b="1" dirty="0">
                 <a:solidFill>
                   <a:srgbClr val="333333"/>
                 </a:solidFill>
@@ -19677,7 +19557,7 @@
               </a:rPr>
               <a:t>选择特征</a:t>
             </a:r>
-            <a:endParaRPr lang="en-US" altLang="zh-CN" sz="2800" b="1" dirty="0">
+            <a:endParaRPr lang="en-US" altLang="zh-CN" sz="3200" b="1" dirty="0">
               <a:solidFill>
                 <a:srgbClr val="333333"/>
               </a:solidFill>
@@ -19688,7 +19568,7 @@
           <a:p>
             <a:pPr algn="just"/>
             <a:r>
-              <a:rPr lang="zh-CN" altLang="en-US" sz="2800" b="1" dirty="0">
+              <a:rPr lang="zh-CN" altLang="en-US" sz="3200" b="1" dirty="0">
                 <a:solidFill>
                   <a:srgbClr val="333333"/>
                 </a:solidFill>
@@ -19698,7 +19578,7 @@
               <a:t>点击</a:t>
             </a:r>
             <a:r>
-              <a:rPr lang="en-US" altLang="zh-CN" sz="2800" b="1" dirty="0">
+              <a:rPr lang="en-US" altLang="zh-CN" sz="3200" b="1" dirty="0">
                 <a:solidFill>
                   <a:srgbClr val="333333"/>
                 </a:solidFill>
@@ -19708,7 +19588,7 @@
               <a:t>open attribute table</a:t>
             </a:r>
             <a:r>
-              <a:rPr lang="zh-CN" altLang="en-US" sz="2800" b="1" dirty="0">
+              <a:rPr lang="zh-CN" altLang="en-US" sz="3200" b="1" dirty="0">
                 <a:solidFill>
                   <a:srgbClr val="333333"/>
                 </a:solidFill>
@@ -19717,7 +19597,7 @@
               </a:rPr>
               <a:t>）</a:t>
             </a:r>
-            <a:endParaRPr lang="en-US" altLang="zh-CN" sz="2800" b="1" dirty="0">
+            <a:endParaRPr lang="en-US" altLang="zh-CN" sz="3200" b="1" dirty="0">
               <a:solidFill>
                 <a:srgbClr val="333333"/>
               </a:solidFill>
@@ -19741,8 +19621,8 @@
         </p:nvGrpSpPr>
         <p:grpSpPr>
           <a:xfrm>
-            <a:off x="130629" y="2381455"/>
-            <a:ext cx="6328044" cy="3571530"/>
+            <a:off x="195943" y="2629470"/>
+            <a:ext cx="5900057" cy="3277844"/>
             <a:chOff x="0" y="2308410"/>
             <a:chExt cx="5858687" cy="3119870"/>
           </a:xfrm>
@@ -19775,6 +19655,13 @@
             <a:prstGeom prst="rect">
               <a:avLst/>
             </a:prstGeom>
+            <a:ln w="28575">
+              <a:solidFill>
+                <a:schemeClr val="accent1">
+                  <a:lumMod val="75000"/>
+                </a:schemeClr>
+              </a:solidFill>
+            </a:ln>
           </p:spPr>
         </p:pic>
         <p:sp>
@@ -19800,7 +19687,9 @@
             <a:noFill/>
             <a:ln w="28575">
               <a:solidFill>
-                <a:schemeClr val="accent2"/>
+                <a:schemeClr val="accent1">
+                  <a:lumMod val="75000"/>
+                </a:schemeClr>
               </a:solidFill>
             </a:ln>
           </p:spPr>
@@ -19813,7 +19702,7 @@
               <a:pPr algn="l"/>
               <a:endParaRPr lang="en-CN" b="1" dirty="0">
                 <a:solidFill>
-                  <a:srgbClr val="FF0000"/>
+                  <a:schemeClr val="bg2"/>
                 </a:solidFill>
                 <a:latin typeface="微软雅黑" pitchFamily="34" charset="-122"/>
                 <a:ea typeface="微软雅黑" pitchFamily="34" charset="-122"/>
@@ -19836,10 +19725,10 @@
         </p:nvGrpSpPr>
         <p:grpSpPr>
           <a:xfrm>
-            <a:off x="3139364" y="3665891"/>
-            <a:ext cx="5874007" cy="3152302"/>
+            <a:off x="6321878" y="2629470"/>
+            <a:ext cx="5674179" cy="3277844"/>
             <a:chOff x="3139364" y="3313253"/>
-            <a:chExt cx="5874007" cy="3152302"/>
+            <a:chExt cx="5336979" cy="3152302"/>
           </a:xfrm>
         </p:grpSpPr>
         <p:pic>
@@ -19858,6 +19747,7 @@
           </p:nvPicPr>
           <p:blipFill>
             <a:blip r:embed="rId4"/>
+            <a:srcRect r="9142"/>
             <a:stretch>
               <a:fillRect/>
             </a:stretch>
@@ -19865,11 +19755,18 @@
           <p:spPr>
             <a:xfrm>
               <a:off x="3139364" y="3313253"/>
-              <a:ext cx="5874007" cy="3152302"/>
+              <a:ext cx="5336979" cy="3152302"/>
             </a:xfrm>
             <a:prstGeom prst="rect">
               <a:avLst/>
             </a:prstGeom>
+            <a:ln w="28575">
+              <a:solidFill>
+                <a:schemeClr val="accent1">
+                  <a:lumMod val="75000"/>
+                </a:schemeClr>
+              </a:solidFill>
+            </a:ln>
           </p:spPr>
         </p:pic>
         <p:sp>
@@ -19895,7 +19792,9 @@
             <a:noFill/>
             <a:ln w="28575">
               <a:solidFill>
-                <a:schemeClr val="accent2"/>
+                <a:schemeClr val="accent1">
+                  <a:lumMod val="75000"/>
+                </a:schemeClr>
               </a:solidFill>
             </a:ln>
           </p:spPr>
@@ -19962,8 +19861,8 @@
         </p:nvSpPr>
         <p:spPr>
           <a:xfrm>
-            <a:off x="0" y="8526"/>
-            <a:ext cx="9013371" cy="792162"/>
+            <a:off x="1" y="8526"/>
+            <a:ext cx="10537372" cy="792162"/>
           </a:xfrm>
         </p:spPr>
         <p:txBody>
@@ -19994,8 +19893,8 @@
         </p:nvSpPr>
         <p:spPr>
           <a:xfrm>
-            <a:off x="239287" y="1046261"/>
-            <a:ext cx="8094816" cy="1169551"/>
+            <a:off x="123372" y="988789"/>
+            <a:ext cx="9720217" cy="1169551"/>
           </a:xfrm>
           <a:prstGeom prst="rect">
             <a:avLst/>
@@ -20098,18 +19997,26 @@
         </p:nvPicPr>
         <p:blipFill>
           <a:blip r:embed="rId3"/>
+          <a:srcRect l="1588"/>
           <a:stretch>
             <a:fillRect/>
           </a:stretch>
         </p:blipFill>
         <p:spPr>
           <a:xfrm>
-            <a:off x="1470825" y="2215812"/>
-            <a:ext cx="5631739" cy="4459148"/>
+            <a:off x="3011714" y="2273868"/>
+            <a:ext cx="5542280" cy="4459148"/>
           </a:xfrm>
           <a:prstGeom prst="rect">
             <a:avLst/>
           </a:prstGeom>
+          <a:ln w="28575">
+            <a:solidFill>
+              <a:schemeClr val="accent1">
+                <a:lumMod val="75000"/>
+              </a:schemeClr>
+            </a:solidFill>
+          </a:ln>
         </p:spPr>
       </p:pic>
     </p:spTree>
@@ -20157,8 +20064,8 @@
         </p:nvSpPr>
         <p:spPr>
           <a:xfrm>
-            <a:off x="0" y="8526"/>
-            <a:ext cx="9013371" cy="792162"/>
+            <a:off x="1" y="8526"/>
+            <a:ext cx="10537372" cy="792162"/>
           </a:xfrm>
         </p:spPr>
         <p:txBody>
@@ -20189,8 +20096,8 @@
         </p:nvSpPr>
         <p:spPr>
           <a:xfrm>
-            <a:off x="239287" y="1090829"/>
-            <a:ext cx="8094816" cy="2156168"/>
+            <a:off x="224971" y="902143"/>
+            <a:ext cx="11908972" cy="1812163"/>
           </a:xfrm>
           <a:prstGeom prst="rect">
             <a:avLst/>
@@ -20205,7 +20112,7 @@
           <a:p>
             <a:pPr algn="just"/>
             <a:r>
-              <a:rPr lang="en-US" altLang="zh-CN" sz="2800" b="1" dirty="0" err="1">
+              <a:rPr lang="en-US" altLang="zh-CN" sz="3200" b="1" dirty="0" err="1">
                 <a:solidFill>
                   <a:srgbClr val="333333"/>
                 </a:solidFill>
@@ -20215,7 +20122,7 @@
               <a:t>Geopandas</a:t>
             </a:r>
             <a:r>
-              <a:rPr lang="zh-CN" altLang="en-US" sz="2800" b="1" dirty="0">
+              <a:rPr lang="zh-CN" altLang="en-US" sz="3200" b="1" dirty="0">
                 <a:solidFill>
                   <a:srgbClr val="333333"/>
                 </a:solidFill>
@@ -20224,7 +20131,7 @@
               </a:rPr>
               <a:t>开源库</a:t>
             </a:r>
-            <a:endParaRPr lang="en-US" altLang="zh-CN" sz="2800" b="1" dirty="0">
+            <a:endParaRPr lang="en-US" altLang="zh-CN" sz="3200" b="1" dirty="0">
               <a:solidFill>
                 <a:srgbClr val="333333"/>
               </a:solidFill>
@@ -20239,7 +20146,7 @@
               </a:lnSpc>
             </a:pPr>
             <a:r>
-              <a:rPr lang="en-US" sz="2200" dirty="0" err="1">
+              <a:rPr lang="en-US" dirty="0" err="1">
                 <a:solidFill>
                   <a:schemeClr val="bg2"/>
                 </a:solidFill>
@@ -20249,7 +20156,7 @@
               <a:t>GeoPandas为在</a:t>
             </a:r>
             <a:r>
-              <a:rPr lang="zh-CN" altLang="en-US" sz="2200" dirty="0">
+              <a:rPr lang="zh-CN" altLang="en-US" dirty="0">
                 <a:solidFill>
                   <a:schemeClr val="bg2"/>
                 </a:solidFill>
@@ -20259,7 +20166,7 @@
               <a:t>开源库</a:t>
             </a:r>
             <a:r>
-              <a:rPr lang="en-US" altLang="zh-CN" sz="2200" b="1" dirty="0">
+              <a:rPr lang="en-US" altLang="zh-CN" b="1" dirty="0">
                 <a:solidFill>
                   <a:schemeClr val="bg2"/>
                 </a:solidFill>
@@ -20269,7 +20176,7 @@
               <a:t>Pandas</a:t>
             </a:r>
             <a:r>
-              <a:rPr lang="zh-CN" altLang="en-US" sz="2200" b="1" dirty="0">
+              <a:rPr lang="zh-CN" altLang="en-US" b="1" dirty="0">
                 <a:solidFill>
                   <a:schemeClr val="bg2"/>
                 </a:solidFill>
@@ -20279,7 +20186,7 @@
               <a:t>基础上进行功能扩展</a:t>
             </a:r>
             <a:r>
-              <a:rPr lang="zh-CN" altLang="en-US" sz="2200" dirty="0">
+              <a:rPr lang="zh-CN" altLang="en-US" dirty="0">
                 <a:solidFill>
                   <a:schemeClr val="bg2"/>
                 </a:solidFill>
@@ -20289,7 +20196,7 @@
               <a:t>，以实现对地理空间数据的处理。</a:t>
             </a:r>
             <a:r>
-              <a:rPr lang="en-US" altLang="zh-CN" sz="2200" dirty="0" err="1">
+              <a:rPr lang="en-US" altLang="zh-CN" dirty="0" err="1">
                 <a:solidFill>
                   <a:schemeClr val="bg2"/>
                 </a:solidFill>
@@ -20299,7 +20206,7 @@
               <a:t>GeoPandas</a:t>
             </a:r>
             <a:r>
-              <a:rPr lang="zh-CN" altLang="en-US" sz="2200" dirty="0">
+              <a:rPr lang="zh-CN" altLang="en-US" dirty="0">
                 <a:solidFill>
                   <a:schemeClr val="bg2"/>
                 </a:solidFill>
@@ -20309,7 +20216,7 @@
               <a:t>包含两种数据结构：</a:t>
             </a:r>
             <a:r>
-              <a:rPr lang="en-US" altLang="zh-CN" sz="2200" dirty="0" err="1">
+              <a:rPr lang="en-US" altLang="zh-CN" dirty="0" err="1">
                 <a:solidFill>
                   <a:schemeClr val="bg2"/>
                 </a:solidFill>
@@ -20319,7 +20226,7 @@
               <a:t>geopandas.Series</a:t>
             </a:r>
             <a:r>
-              <a:rPr lang="zh-CN" altLang="en-US" sz="2200" dirty="0">
+              <a:rPr lang="zh-CN" altLang="en-US" dirty="0">
                 <a:solidFill>
                   <a:schemeClr val="bg2"/>
                 </a:solidFill>
@@ -20329,7 +20236,7 @@
               <a:t>和</a:t>
             </a:r>
             <a:r>
-              <a:rPr lang="en-US" altLang="zh-CN" sz="2200" dirty="0" err="1">
+              <a:rPr lang="en-US" altLang="zh-CN" dirty="0" err="1">
                 <a:solidFill>
                   <a:schemeClr val="bg2"/>
                 </a:solidFill>
@@ -20339,7 +20246,7 @@
               <a:t>geopandas.GeoDataFrame</a:t>
             </a:r>
             <a:r>
-              <a:rPr lang="en-US" altLang="zh-CN" sz="2200" dirty="0">
+              <a:rPr lang="en-US" altLang="zh-CN" dirty="0">
                 <a:solidFill>
                   <a:schemeClr val="bg2"/>
                 </a:solidFill>
@@ -20348,7 +20255,7 @@
               </a:rPr>
               <a:t>. </a:t>
             </a:r>
-            <a:endParaRPr lang="en-US" altLang="zh-CN" sz="2200" b="1" dirty="0">
+            <a:endParaRPr lang="en-US" altLang="zh-CN" b="1" dirty="0">
               <a:solidFill>
                 <a:srgbClr val="333333"/>
               </a:solidFill>
@@ -20380,8 +20287,8 @@
         </p:blipFill>
         <p:spPr>
           <a:xfrm>
-            <a:off x="1309887" y="3248704"/>
-            <a:ext cx="5953614" cy="3175825"/>
+            <a:off x="2569029" y="2849040"/>
+            <a:ext cx="6320072" cy="3371304"/>
           </a:xfrm>
           <a:prstGeom prst="rect">
             <a:avLst/>
@@ -20402,7 +20309,7 @@
         </p:nvSpPr>
         <p:spPr>
           <a:xfrm>
-            <a:off x="1974651" y="6355079"/>
+            <a:off x="3563966" y="6355078"/>
             <a:ext cx="4624086" cy="400110"/>
           </a:xfrm>
           <a:prstGeom prst="rect">
@@ -20488,7 +20395,7 @@
         <p:spPr>
           <a:xfrm>
             <a:off x="0" y="8526"/>
-            <a:ext cx="9013371" cy="792162"/>
+            <a:ext cx="10537372" cy="792162"/>
           </a:xfrm>
         </p:spPr>
         <p:txBody>
@@ -20519,8 +20426,8 @@
         </p:nvSpPr>
         <p:spPr>
           <a:xfrm>
-            <a:off x="239287" y="1090829"/>
-            <a:ext cx="8094816" cy="523220"/>
+            <a:off x="341087" y="1011002"/>
+            <a:ext cx="9517016" cy="584775"/>
           </a:xfrm>
           <a:prstGeom prst="rect">
             <a:avLst/>
@@ -20535,7 +20442,7 @@
           <a:p>
             <a:pPr algn="just"/>
             <a:r>
-              <a:rPr lang="en-US" altLang="zh-CN" sz="2800" b="1" dirty="0" err="1">
+              <a:rPr lang="en-US" altLang="zh-CN" sz="3200" b="1" dirty="0" err="1">
                 <a:solidFill>
                   <a:srgbClr val="333333"/>
                 </a:solidFill>
@@ -20545,7 +20452,7 @@
               <a:t>Geopandas</a:t>
             </a:r>
             <a:r>
-              <a:rPr lang="zh-CN" altLang="en-US" sz="2800" b="1" dirty="0">
+              <a:rPr lang="zh-CN" altLang="en-US" sz="3200" b="1" dirty="0">
                 <a:solidFill>
                   <a:srgbClr val="333333"/>
                 </a:solidFill>
@@ -20554,7 +20461,7 @@
               </a:rPr>
               <a:t>开源库</a:t>
             </a:r>
-            <a:endParaRPr lang="en-US" altLang="zh-CN" sz="2800" b="1" dirty="0">
+            <a:endParaRPr lang="en-US" altLang="zh-CN" sz="3200" b="1" dirty="0">
               <a:solidFill>
                 <a:srgbClr val="333333"/>
               </a:solidFill>
@@ -20578,8 +20485,8 @@
         </p:nvSpPr>
         <p:spPr>
           <a:xfrm>
-            <a:off x="321904" y="1754901"/>
-            <a:ext cx="8549951" cy="4729949"/>
+            <a:off x="341087" y="1580732"/>
+            <a:ext cx="11538856" cy="5151538"/>
           </a:xfrm>
           <a:prstGeom prst="rect">
             <a:avLst/>
@@ -20592,24 +20499,16 @@
           </a:bodyPr>
           <a:lstStyle/>
           <a:p>
-            <a:pPr marL="0" marR="0" lvl="0" indent="0" algn="l" defTabSz="914400" rtl="0" eaLnBrk="0" fontAlgn="base" latinLnBrk="0" hangingPunct="0">
+            <a:pPr algn="l" eaLnBrk="0" hangingPunct="0">
               <a:lnSpc>
                 <a:spcPct val="200000"/>
               </a:lnSpc>
               <a:spcBef>
                 <a:spcPct val="0"/>
               </a:spcBef>
-              <a:spcAft>
-                <a:spcPct val="0"/>
-              </a:spcAft>
-              <a:buClrTx/>
-              <a:buSzTx/>
-              <a:buFontTx/>
-              <a:buNone/>
-              <a:tabLst/>
             </a:pPr>
             <a:r>
-              <a:rPr lang="zh-CN" altLang="zh-CN" sz="2200" dirty="0">
+              <a:rPr lang="zh-CN" altLang="zh-CN" dirty="0">
                 <a:solidFill>
                   <a:schemeClr val="bg2"/>
                 </a:solidFill>
@@ -20619,7 +20518,7 @@
               <a:t>结合了 pandas（数据分析）和 shapely（几何操作）的功能，支持对</a:t>
             </a:r>
             <a:r>
-              <a:rPr lang="zh-CN" altLang="zh-CN" sz="2200" u="sng" dirty="0">
+              <a:rPr lang="zh-CN" altLang="zh-CN" u="sng" dirty="0">
                 <a:solidFill>
                   <a:schemeClr val="bg2"/>
                 </a:solidFill>
@@ -20629,7 +20528,7 @@
               <a:t>矢量地理数据（如点、线、面）进行高效操作</a:t>
             </a:r>
             <a:r>
-              <a:rPr lang="zh-CN" altLang="zh-CN" sz="2200" dirty="0">
+              <a:rPr lang="zh-CN" altLang="zh-CN" dirty="0">
                 <a:solidFill>
                   <a:schemeClr val="bg2"/>
                 </a:solidFill>
@@ -20639,7 +20538,7 @@
               <a:t>。</a:t>
             </a:r>
             <a:br>
-              <a:rPr lang="zh-CN" altLang="zh-CN" sz="2200" dirty="0">
+              <a:rPr lang="zh-CN" altLang="zh-CN" dirty="0">
                 <a:solidFill>
                   <a:schemeClr val="bg2"/>
                 </a:solidFill>
@@ -20648,7 +20547,7 @@
               </a:rPr>
             </a:br>
             <a:r>
-              <a:rPr lang="zh-CN" altLang="zh-CN" sz="2200" dirty="0">
+              <a:rPr lang="zh-CN" altLang="zh-CN" dirty="0">
                 <a:solidFill>
                   <a:schemeClr val="bg2"/>
                 </a:solidFill>
@@ -20659,24 +20558,18 @@
             </a:r>
           </a:p>
           <a:p>
-            <a:pPr marL="0" marR="0" lvl="0" indent="0" algn="l" defTabSz="914400" rtl="0" eaLnBrk="0" fontAlgn="base" latinLnBrk="0" hangingPunct="0">
+            <a:pPr algn="l" eaLnBrk="0" hangingPunct="0">
               <a:lnSpc>
                 <a:spcPct val="200000"/>
               </a:lnSpc>
               <a:spcBef>
                 <a:spcPct val="0"/>
               </a:spcBef>
-              <a:spcAft>
-                <a:spcPct val="0"/>
-              </a:spcAft>
-              <a:buClrTx/>
-              <a:buSzTx/>
               <a:buFontTx/>
               <a:buChar char="•"/>
-              <a:tabLst/>
             </a:pPr>
             <a:r>
-              <a:rPr lang="en-US" altLang="zh-CN" sz="2200" dirty="0">
+              <a:rPr lang="en-US" altLang="zh-CN" dirty="0">
                 <a:solidFill>
                   <a:schemeClr val="bg2"/>
                 </a:solidFill>
@@ -20686,7 +20579,7 @@
               <a:t> </a:t>
             </a:r>
             <a:r>
-              <a:rPr lang="zh-CN" altLang="zh-CN" sz="2200" dirty="0">
+              <a:rPr lang="zh-CN" altLang="zh-CN" dirty="0">
                 <a:solidFill>
                   <a:schemeClr val="bg2"/>
                 </a:solidFill>
@@ -20696,7 +20589,7 @@
               <a:t>提供 GeoDataFrame 和 GeoSeries 数据结构，</a:t>
             </a:r>
             <a:r>
-              <a:rPr lang="zh-CN" altLang="zh-CN" sz="2200" b="1" dirty="0">
+              <a:rPr lang="zh-CN" altLang="zh-CN" b="1" dirty="0">
                 <a:solidFill>
                   <a:schemeClr val="bg2"/>
                 </a:solidFill>
@@ -20706,7 +20599,7 @@
               <a:t>支持空间几何列</a:t>
             </a:r>
             <a:r>
-              <a:rPr lang="zh-CN" altLang="en-US" sz="2200" dirty="0">
+              <a:rPr lang="zh-CN" altLang="en-US" dirty="0">
                 <a:solidFill>
                   <a:schemeClr val="bg2"/>
                 </a:solidFill>
@@ -20715,7 +20608,7 @@
               </a:rPr>
               <a:t>；</a:t>
             </a:r>
-            <a:endParaRPr lang="zh-CN" altLang="zh-CN" sz="2200" dirty="0">
+            <a:endParaRPr lang="zh-CN" altLang="zh-CN" dirty="0">
               <a:solidFill>
                 <a:schemeClr val="bg2"/>
               </a:solidFill>
@@ -20724,24 +20617,18 @@
             </a:endParaRPr>
           </a:p>
           <a:p>
-            <a:pPr marL="0" marR="0" lvl="0" indent="0" algn="l" defTabSz="914400" rtl="0" eaLnBrk="0" fontAlgn="base" latinLnBrk="0" hangingPunct="0">
+            <a:pPr algn="l" eaLnBrk="0" hangingPunct="0">
               <a:lnSpc>
                 <a:spcPct val="200000"/>
               </a:lnSpc>
               <a:spcBef>
                 <a:spcPct val="0"/>
               </a:spcBef>
-              <a:spcAft>
-                <a:spcPct val="0"/>
-              </a:spcAft>
-              <a:buClrTx/>
-              <a:buSzTx/>
               <a:buFontTx/>
               <a:buChar char="•"/>
-              <a:tabLst/>
             </a:pPr>
             <a:r>
-              <a:rPr lang="en-US" altLang="zh-CN" sz="2200" dirty="0">
+              <a:rPr lang="en-US" altLang="zh-CN" dirty="0">
                 <a:solidFill>
                   <a:schemeClr val="bg2"/>
                 </a:solidFill>
@@ -20751,7 +20638,7 @@
               <a:t> </a:t>
             </a:r>
             <a:r>
-              <a:rPr lang="zh-CN" altLang="zh-CN" sz="2200" b="1" dirty="0">
+              <a:rPr lang="zh-CN" altLang="zh-CN" b="1" dirty="0">
                 <a:solidFill>
                   <a:schemeClr val="bg2"/>
                 </a:solidFill>
@@ -20761,7 +20648,7 @@
               <a:t>集成空间关系计算</a:t>
             </a:r>
             <a:r>
-              <a:rPr lang="zh-CN" altLang="zh-CN" sz="2200" dirty="0">
+              <a:rPr lang="zh-CN" altLang="zh-CN" dirty="0">
                 <a:solidFill>
                   <a:schemeClr val="bg2"/>
                 </a:solidFill>
@@ -20771,7 +20658,7 @@
               <a:t>（相交、包含、距离等）</a:t>
             </a:r>
             <a:r>
-              <a:rPr lang="zh-CN" altLang="en-US" sz="2200" dirty="0">
+              <a:rPr lang="zh-CN" altLang="en-US" dirty="0">
                 <a:solidFill>
                   <a:schemeClr val="bg2"/>
                 </a:solidFill>
@@ -20780,7 +20667,7 @@
               </a:rPr>
               <a:t>；</a:t>
             </a:r>
-            <a:endParaRPr lang="zh-CN" altLang="zh-CN" sz="2200" dirty="0">
+            <a:endParaRPr lang="zh-CN" altLang="zh-CN" dirty="0">
               <a:solidFill>
                 <a:schemeClr val="bg2"/>
               </a:solidFill>
@@ -20789,24 +20676,18 @@
             </a:endParaRPr>
           </a:p>
           <a:p>
-            <a:pPr marL="0" marR="0" lvl="0" indent="0" algn="l" defTabSz="914400" rtl="0" eaLnBrk="0" fontAlgn="base" latinLnBrk="0" hangingPunct="0">
+            <a:pPr algn="l" eaLnBrk="0" hangingPunct="0">
               <a:lnSpc>
                 <a:spcPct val="200000"/>
               </a:lnSpc>
               <a:spcBef>
                 <a:spcPct val="0"/>
               </a:spcBef>
-              <a:spcAft>
-                <a:spcPct val="0"/>
-              </a:spcAft>
-              <a:buClrTx/>
-              <a:buSzTx/>
               <a:buFontTx/>
               <a:buChar char="•"/>
-              <a:tabLst/>
             </a:pPr>
             <a:r>
-              <a:rPr lang="en-US" altLang="zh-CN" sz="2200" dirty="0">
+              <a:rPr lang="en-US" altLang="zh-CN" dirty="0">
                 <a:solidFill>
                   <a:schemeClr val="bg2"/>
                 </a:solidFill>
@@ -20816,7 +20697,7 @@
               <a:t> </a:t>
             </a:r>
             <a:r>
-              <a:rPr lang="zh-CN" altLang="zh-CN" sz="2200" b="1" dirty="0">
+              <a:rPr lang="zh-CN" altLang="zh-CN" b="1" dirty="0">
                 <a:solidFill>
                   <a:schemeClr val="bg2"/>
                 </a:solidFill>
@@ -20826,7 +20707,7 @@
               <a:t>支持读写多种地理数据格式</a:t>
             </a:r>
             <a:r>
-              <a:rPr lang="zh-CN" altLang="zh-CN" sz="2200" dirty="0">
+              <a:rPr lang="zh-CN" altLang="zh-CN" dirty="0">
                 <a:solidFill>
                   <a:schemeClr val="bg2"/>
                 </a:solidFill>
@@ -20836,7 +20717,7 @@
               <a:t>（如 Shapefile、GeoJSON）</a:t>
             </a:r>
             <a:r>
-              <a:rPr lang="zh-CN" altLang="en-US" sz="2200" dirty="0">
+              <a:rPr lang="zh-CN" altLang="en-US" dirty="0">
                 <a:solidFill>
                   <a:schemeClr val="bg2"/>
                 </a:solidFill>
@@ -20845,7 +20726,7 @@
               </a:rPr>
               <a:t>；</a:t>
             </a:r>
-            <a:endParaRPr lang="zh-CN" altLang="zh-CN" sz="2200" dirty="0">
+            <a:endParaRPr lang="zh-CN" altLang="zh-CN" dirty="0">
               <a:solidFill>
                 <a:schemeClr val="bg2"/>
               </a:solidFill>
@@ -20854,24 +20735,18 @@
             </a:endParaRPr>
           </a:p>
           <a:p>
-            <a:pPr marL="0" marR="0" lvl="0" indent="0" algn="l" defTabSz="914400" rtl="0" eaLnBrk="0" fontAlgn="base" latinLnBrk="0" hangingPunct="0">
+            <a:pPr algn="l" eaLnBrk="0" hangingPunct="0">
               <a:lnSpc>
                 <a:spcPct val="200000"/>
               </a:lnSpc>
               <a:spcBef>
                 <a:spcPct val="0"/>
               </a:spcBef>
-              <a:spcAft>
-                <a:spcPct val="0"/>
-              </a:spcAft>
-              <a:buClrTx/>
-              <a:buSzTx/>
               <a:buFontTx/>
               <a:buChar char="•"/>
-              <a:tabLst/>
             </a:pPr>
             <a:r>
-              <a:rPr lang="en-US" altLang="zh-CN" sz="2200" dirty="0">
+              <a:rPr lang="en-US" altLang="zh-CN" dirty="0">
                 <a:solidFill>
                   <a:schemeClr val="bg2"/>
                 </a:solidFill>
@@ -20881,7 +20756,7 @@
               <a:t> </a:t>
             </a:r>
             <a:r>
-              <a:rPr lang="zh-CN" altLang="zh-CN" sz="2200" dirty="0">
+              <a:rPr lang="zh-CN" altLang="zh-CN" dirty="0">
                 <a:solidFill>
                   <a:schemeClr val="bg2"/>
                 </a:solidFill>
@@ -20891,7 +20766,7 @@
               <a:t>与 </a:t>
             </a:r>
             <a:r>
-              <a:rPr lang="zh-CN" altLang="zh-CN" sz="2200" b="1" dirty="0">
+              <a:rPr lang="zh-CN" altLang="zh-CN" b="1" dirty="0">
                 <a:solidFill>
                   <a:schemeClr val="bg2"/>
                 </a:solidFill>
@@ -20901,7 +20776,7 @@
               <a:t>matplotlib、folium 等库无缝结合</a:t>
             </a:r>
             <a:r>
-              <a:rPr lang="zh-CN" altLang="zh-CN" sz="2200" dirty="0">
+              <a:rPr lang="zh-CN" altLang="zh-CN" dirty="0">
                 <a:solidFill>
                   <a:schemeClr val="bg2"/>
                 </a:solidFill>
@@ -20958,8 +20833,8 @@
         </p:nvSpPr>
         <p:spPr>
           <a:xfrm>
-            <a:off x="0" y="8526"/>
-            <a:ext cx="9013371" cy="792162"/>
+            <a:off x="1" y="8526"/>
+            <a:ext cx="10537372" cy="792162"/>
           </a:xfrm>
         </p:spPr>
         <p:txBody>
@@ -21004,8 +20879,8 @@
         </p:nvSpPr>
         <p:spPr>
           <a:xfrm>
-            <a:off x="239286" y="1138859"/>
-            <a:ext cx="8904713" cy="4828373"/>
+            <a:off x="312057" y="1138860"/>
+            <a:ext cx="11306629" cy="5617756"/>
           </a:xfrm>
           <a:prstGeom prst="rect">
             <a:avLst/>
@@ -21020,7 +20895,7 @@
           <a:p>
             <a:pPr algn="just"/>
             <a:r>
-              <a:rPr lang="en-US" altLang="zh-CN" b="1" dirty="0" err="1">
+              <a:rPr lang="en-US" altLang="zh-CN" sz="2800" b="1" dirty="0" err="1">
                 <a:solidFill>
                   <a:srgbClr val="333333"/>
                 </a:solidFill>
@@ -21030,7 +20905,7 @@
               <a:t>Geopandas</a:t>
             </a:r>
             <a:r>
-              <a:rPr lang="zh-CN" altLang="en-US" b="1" dirty="0">
+              <a:rPr lang="zh-CN" altLang="en-US" sz="2800" b="1" dirty="0">
                 <a:solidFill>
                   <a:srgbClr val="333333"/>
                 </a:solidFill>
@@ -21039,7 +20914,7 @@
               </a:rPr>
               <a:t>开源库</a:t>
             </a:r>
-            <a:endParaRPr lang="en-US" altLang="zh-CN" b="1" dirty="0">
+            <a:endParaRPr lang="en-US" altLang="zh-CN" sz="2800" b="1" dirty="0">
               <a:solidFill>
                 <a:srgbClr val="333333"/>
               </a:solidFill>
@@ -21054,7 +20929,7 @@
               </a:lnSpc>
             </a:pPr>
             <a:r>
-              <a:rPr lang="en-US" b="1" dirty="0" err="1">
+              <a:rPr lang="en-US" sz="2800" b="1" dirty="0" err="1">
                 <a:solidFill>
                   <a:srgbClr val="333333"/>
                 </a:solidFill>
@@ -21064,7 +20939,7 @@
               <a:t>数据读入</a:t>
             </a:r>
             <a:r>
-              <a:rPr lang="zh-CN" altLang="en-US" b="1" dirty="0">
+              <a:rPr lang="zh-CN" altLang="en-US" sz="2800" b="1" dirty="0">
                 <a:solidFill>
                   <a:srgbClr val="333333"/>
                 </a:solidFill>
@@ -21074,7 +20949,7 @@
               <a:t>：</a:t>
             </a:r>
             <a:r>
-              <a:rPr lang="en-CN" dirty="0">
+              <a:rPr lang="en-CN" sz="2800" dirty="0">
                 <a:solidFill>
                   <a:srgbClr val="333333"/>
                 </a:solidFill>
@@ -21091,7 +20966,7 @@
               </a:lnSpc>
             </a:pPr>
             <a:r>
-              <a:rPr lang="en-CN" b="1" dirty="0">
+              <a:rPr lang="en-CN" sz="2800" b="1" dirty="0">
                 <a:solidFill>
                   <a:srgbClr val="333333"/>
                 </a:solidFill>
@@ -21101,7 +20976,7 @@
               <a:t>数据查看</a:t>
             </a:r>
             <a:r>
-              <a:rPr lang="zh-CN" altLang="en-US" b="1" dirty="0">
+              <a:rPr lang="zh-CN" altLang="en-US" sz="2800" b="1" dirty="0">
                 <a:solidFill>
                   <a:srgbClr val="333333"/>
                 </a:solidFill>
@@ -21111,7 +20986,7 @@
               <a:t>：</a:t>
             </a:r>
             <a:r>
-              <a:rPr lang="en-US" altLang="zh-CN" dirty="0">
+              <a:rPr lang="en-US" altLang="zh-CN" sz="2800" dirty="0">
                 <a:solidFill>
                   <a:srgbClr val="333333"/>
                 </a:solidFill>
@@ -21120,7 +20995,7 @@
               </a:rPr>
               <a:t>.head()</a:t>
             </a:r>
-            <a:endParaRPr lang="en-CN" dirty="0">
+            <a:endParaRPr lang="en-CN" sz="2800" dirty="0">
               <a:solidFill>
                 <a:srgbClr val="333333"/>
               </a:solidFill>
@@ -21135,7 +21010,7 @@
               </a:lnSpc>
             </a:pPr>
             <a:r>
-              <a:rPr lang="en-US" b="1" dirty="0" err="1">
+              <a:rPr lang="en-US" sz="2800" b="1" dirty="0" err="1">
                 <a:solidFill>
                   <a:srgbClr val="333333"/>
                 </a:solidFill>
@@ -21145,7 +21020,7 @@
               <a:t>坐标系统查看</a:t>
             </a:r>
             <a:r>
-              <a:rPr lang="zh-CN" altLang="en-US" b="1" dirty="0">
+              <a:rPr lang="zh-CN" altLang="en-US" sz="2800" b="1" dirty="0">
                 <a:solidFill>
                   <a:srgbClr val="333333"/>
                 </a:solidFill>
@@ -21155,7 +21030,7 @@
               <a:t>：</a:t>
             </a:r>
             <a:r>
-              <a:rPr lang="en-US" altLang="zh-CN" dirty="0">
+              <a:rPr lang="en-US" altLang="zh-CN" sz="2800" dirty="0">
                 <a:solidFill>
                   <a:srgbClr val="333333"/>
                 </a:solidFill>
@@ -21165,7 +21040,7 @@
               <a:t>.</a:t>
             </a:r>
             <a:r>
-              <a:rPr lang="en-US" altLang="zh-CN" dirty="0" err="1">
+              <a:rPr lang="en-US" altLang="zh-CN" sz="2800" dirty="0" err="1">
                 <a:solidFill>
                   <a:srgbClr val="333333"/>
                 </a:solidFill>
@@ -21174,7 +21049,7 @@
               </a:rPr>
               <a:t>crs</a:t>
             </a:r>
-            <a:endParaRPr lang="en-US" dirty="0">
+            <a:endParaRPr lang="en-US" sz="2800" dirty="0">
               <a:solidFill>
                 <a:srgbClr val="333333"/>
               </a:solidFill>
@@ -21189,7 +21064,7 @@
               </a:lnSpc>
             </a:pPr>
             <a:r>
-              <a:rPr lang="en-US" b="1" dirty="0" err="1">
+              <a:rPr lang="en-US" sz="2800" b="1" dirty="0" err="1">
                 <a:solidFill>
                   <a:srgbClr val="333333"/>
                 </a:solidFill>
@@ -21199,7 +21074,7 @@
               <a:t>矢量范围查看</a:t>
             </a:r>
             <a:r>
-              <a:rPr lang="zh-CN" altLang="en-US" b="1" dirty="0">
+              <a:rPr lang="zh-CN" altLang="en-US" sz="2800" b="1" dirty="0">
                 <a:solidFill>
                   <a:srgbClr val="333333"/>
                 </a:solidFill>
@@ -21209,7 +21084,7 @@
               <a:t>：</a:t>
             </a:r>
             <a:r>
-              <a:rPr lang="en-US" altLang="zh-CN" dirty="0">
+              <a:rPr lang="en-US" altLang="zh-CN" sz="2800" dirty="0">
                 <a:solidFill>
                   <a:srgbClr val="333333"/>
                 </a:solidFill>
@@ -21219,7 +21094,7 @@
               <a:t>.bounds, .</a:t>
             </a:r>
             <a:r>
-              <a:rPr lang="en-US" altLang="zh-CN" dirty="0" err="1">
+              <a:rPr lang="en-US" altLang="zh-CN" sz="2800" dirty="0" err="1">
                 <a:solidFill>
                   <a:srgbClr val="333333"/>
                 </a:solidFill>
@@ -21228,7 +21103,7 @@
               </a:rPr>
               <a:t>total_bounds</a:t>
             </a:r>
-            <a:endParaRPr lang="en-US" dirty="0">
+            <a:endParaRPr lang="en-US" sz="2800" dirty="0">
               <a:solidFill>
                 <a:srgbClr val="333333"/>
               </a:solidFill>
@@ -21243,7 +21118,7 @@
               </a:lnSpc>
             </a:pPr>
             <a:r>
-              <a:rPr lang="en-US" b="1" dirty="0" err="1">
+              <a:rPr lang="en-US" sz="2800" b="1" dirty="0" err="1">
                 <a:solidFill>
                   <a:srgbClr val="333333"/>
                 </a:solidFill>
@@ -21253,7 +21128,7 @@
               <a:t>矢量数据写出</a:t>
             </a:r>
             <a:r>
-              <a:rPr lang="zh-CN" altLang="en-US" b="1" dirty="0">
+              <a:rPr lang="zh-CN" altLang="en-US" sz="2800" b="1" dirty="0">
                 <a:solidFill>
                   <a:srgbClr val="333333"/>
                 </a:solidFill>
@@ -21263,7 +21138,7 @@
               <a:t>：</a:t>
             </a:r>
             <a:r>
-              <a:rPr lang="en-US" dirty="0">
+              <a:rPr lang="en-US" sz="2800" dirty="0">
                 <a:solidFill>
                   <a:srgbClr val="333333"/>
                 </a:solidFill>
@@ -21273,7 +21148,7 @@
               <a:t>.</a:t>
             </a:r>
             <a:r>
-              <a:rPr lang="en-US" dirty="0" err="1">
+              <a:rPr lang="en-US" sz="2800" dirty="0" err="1">
                 <a:solidFill>
                   <a:srgbClr val="333333"/>
                 </a:solidFill>
@@ -21283,7 +21158,7 @@
               <a:t>to_file</a:t>
             </a:r>
             <a:r>
-              <a:rPr lang="en-US" dirty="0">
+              <a:rPr lang="en-US" sz="2800" dirty="0">
                 <a:solidFill>
                   <a:srgbClr val="333333"/>
                 </a:solidFill>
@@ -21300,7 +21175,7 @@
               </a:lnSpc>
             </a:pPr>
             <a:r>
-              <a:rPr lang="en-US" dirty="0">
+              <a:rPr lang="en-US" sz="2800" dirty="0">
                 <a:solidFill>
                   <a:srgbClr val="333333"/>
                 </a:solidFill>
